--- a/figs/byotee-overview.pptx
+++ b/figs/byotee-overview.pptx
@@ -107,6 +107,11 @@
       </a:defRPr>
     </a:lvl9pPr>
   </p:defaultTextStyle>
+  <p:extLst>
+    <p:ext uri="{EFAFB233-063F-42B5-8137-9DF3F51BA10A}">
+      <p15:sldGuideLst xmlns:p15="http://schemas.microsoft.com/office/powerpoint/2012/main"/>
+    </p:ext>
+  </p:extLst>
 </p:presentation>
 </file>
 
@@ -192,7 +197,7 @@
           <a:p>
             <a:fld id="{B4313A1E-513A-C146-8DB7-A4D1DCEAAF7D}" type="datetimeFigureOut">
               <a:rPr lang="en-US" smtClean="0"/>
-              <a:t>8/21/26</a:t>
+              <a:t>8/26/26</a:t>
             </a:fld>
             <a:endParaRPr lang="en-US"/>
           </a:p>
@@ -674,7 +679,7 @@
           <a:p>
             <a:fld id="{728D558A-DF59-A249-A8DD-6F235DCEC2AE}" type="datetimeFigureOut">
               <a:rPr lang="en-US" smtClean="0"/>
-              <a:t>8/21/26</a:t>
+              <a:t>8/26/26</a:t>
             </a:fld>
             <a:endParaRPr lang="en-US"/>
           </a:p>
@@ -844,7 +849,7 @@
           <a:p>
             <a:fld id="{728D558A-DF59-A249-A8DD-6F235DCEC2AE}" type="datetimeFigureOut">
               <a:rPr lang="en-US" smtClean="0"/>
-              <a:t>8/21/26</a:t>
+              <a:t>8/26/26</a:t>
             </a:fld>
             <a:endParaRPr lang="en-US"/>
           </a:p>
@@ -1024,7 +1029,7 @@
           <a:p>
             <a:fld id="{728D558A-DF59-A249-A8DD-6F235DCEC2AE}" type="datetimeFigureOut">
               <a:rPr lang="en-US" smtClean="0"/>
-              <a:t>8/21/26</a:t>
+              <a:t>8/26/26</a:t>
             </a:fld>
             <a:endParaRPr lang="en-US"/>
           </a:p>
@@ -1194,7 +1199,7 @@
           <a:p>
             <a:fld id="{728D558A-DF59-A249-A8DD-6F235DCEC2AE}" type="datetimeFigureOut">
               <a:rPr lang="en-US" smtClean="0"/>
-              <a:t>8/21/26</a:t>
+              <a:t>8/26/26</a:t>
             </a:fld>
             <a:endParaRPr lang="en-US"/>
           </a:p>
@@ -1440,7 +1445,7 @@
           <a:p>
             <a:fld id="{728D558A-DF59-A249-A8DD-6F235DCEC2AE}" type="datetimeFigureOut">
               <a:rPr lang="en-US" smtClean="0"/>
-              <a:t>8/21/26</a:t>
+              <a:t>8/26/26</a:t>
             </a:fld>
             <a:endParaRPr lang="en-US"/>
           </a:p>
@@ -1672,7 +1677,7 @@
           <a:p>
             <a:fld id="{728D558A-DF59-A249-A8DD-6F235DCEC2AE}" type="datetimeFigureOut">
               <a:rPr lang="en-US" smtClean="0"/>
-              <a:t>8/21/26</a:t>
+              <a:t>8/26/26</a:t>
             </a:fld>
             <a:endParaRPr lang="en-US"/>
           </a:p>
@@ -2039,7 +2044,7 @@
           <a:p>
             <a:fld id="{728D558A-DF59-A249-A8DD-6F235DCEC2AE}" type="datetimeFigureOut">
               <a:rPr lang="en-US" smtClean="0"/>
-              <a:t>8/21/26</a:t>
+              <a:t>8/26/26</a:t>
             </a:fld>
             <a:endParaRPr lang="en-US"/>
           </a:p>
@@ -2157,7 +2162,7 @@
           <a:p>
             <a:fld id="{728D558A-DF59-A249-A8DD-6F235DCEC2AE}" type="datetimeFigureOut">
               <a:rPr lang="en-US" smtClean="0"/>
-              <a:t>8/21/26</a:t>
+              <a:t>8/26/26</a:t>
             </a:fld>
             <a:endParaRPr lang="en-US"/>
           </a:p>
@@ -2252,7 +2257,7 @@
           <a:p>
             <a:fld id="{728D558A-DF59-A249-A8DD-6F235DCEC2AE}" type="datetimeFigureOut">
               <a:rPr lang="en-US" smtClean="0"/>
-              <a:t>8/21/26</a:t>
+              <a:t>8/26/26</a:t>
             </a:fld>
             <a:endParaRPr lang="en-US"/>
           </a:p>
@@ -2529,7 +2534,7 @@
           <a:p>
             <a:fld id="{728D558A-DF59-A249-A8DD-6F235DCEC2AE}" type="datetimeFigureOut">
               <a:rPr lang="en-US" smtClean="0"/>
-              <a:t>8/21/26</a:t>
+              <a:t>8/26/26</a:t>
             </a:fld>
             <a:endParaRPr lang="en-US"/>
           </a:p>
@@ -2786,7 +2791,7 @@
           <a:p>
             <a:fld id="{728D558A-DF59-A249-A8DD-6F235DCEC2AE}" type="datetimeFigureOut">
               <a:rPr lang="en-US" smtClean="0"/>
-              <a:t>8/21/26</a:t>
+              <a:t>8/26/26</a:t>
             </a:fld>
             <a:endParaRPr lang="en-US"/>
           </a:p>
@@ -2999,7 +3004,7 @@
           <a:p>
             <a:fld id="{728D558A-DF59-A249-A8DD-6F235DCEC2AE}" type="datetimeFigureOut">
               <a:rPr lang="en-US" smtClean="0"/>
-              <a:t>8/21/26</a:t>
+              <a:t>8/26/26</a:t>
             </a:fld>
             <a:endParaRPr lang="en-US"/>
           </a:p>
@@ -3424,7 +3429,12 @@
           <a:prstGeom prst="rect">
             <a:avLst/>
           </a:prstGeom>
-          <a:noFill/>
+          <a:solidFill>
+            <a:schemeClr val="accent2">
+              <a:lumMod val="20000"/>
+              <a:lumOff val="80000"/>
+            </a:schemeClr>
+          </a:solidFill>
           <a:ln w="28575">
             <a:solidFill>
               <a:schemeClr val="tx1">
@@ -3516,12 +3526,17 @@
         <p:spPr>
           <a:xfrm>
             <a:off x="1844782" y="2150407"/>
-            <a:ext cx="1817783" cy="1840775"/>
+            <a:ext cx="1817783" cy="1510380"/>
           </a:xfrm>
           <a:prstGeom prst="rect">
             <a:avLst/>
           </a:prstGeom>
-          <a:noFill/>
+          <a:solidFill>
+            <a:schemeClr val="accent6">
+              <a:lumMod val="20000"/>
+              <a:lumOff val="80000"/>
+            </a:schemeClr>
+          </a:solidFill>
           <a:ln w="28575">
             <a:solidFill>
               <a:schemeClr val="tx1">
@@ -3598,96 +3613,6 @@
           </a:p>
         </p:txBody>
       </p:sp>
-      <p:cxnSp>
-        <p:nvCxnSpPr>
-          <p:cNvPr id="339" name="Straight Connector 338">
-            <a:extLst>
-              <a:ext uri="{FF2B5EF4-FFF2-40B4-BE49-F238E27FC236}">
-                <a16:creationId xmlns:a16="http://schemas.microsoft.com/office/drawing/2014/main" id="{78E2DA62-CEFF-5A1B-E7E6-4DCD654268D5}"/>
-              </a:ext>
-            </a:extLst>
-          </p:cNvPr>
-          <p:cNvCxnSpPr/>
-          <p:nvPr/>
-        </p:nvCxnSpPr>
-        <p:spPr>
-          <a:xfrm>
-            <a:off x="26999" y="3060742"/>
-            <a:ext cx="3635566" cy="0"/>
-          </a:xfrm>
-          <a:prstGeom prst="line">
-            <a:avLst/>
-          </a:prstGeom>
-          <a:ln w="28575" cap="flat" cmpd="sng" algn="ctr">
-            <a:solidFill>
-              <a:schemeClr val="tx1">
-                <a:lumMod val="65000"/>
-                <a:lumOff val="35000"/>
-              </a:schemeClr>
-            </a:solidFill>
-            <a:prstDash val="dash"/>
-            <a:round/>
-            <a:headEnd type="none" w="med" len="med"/>
-            <a:tailEnd type="none" w="med" len="med"/>
-          </a:ln>
-        </p:spPr>
-        <p:style>
-          <a:lnRef idx="0">
-            <a:scrgbClr r="0" g="0" b="0"/>
-          </a:lnRef>
-          <a:fillRef idx="0">
-            <a:scrgbClr r="0" g="0" b="0"/>
-          </a:fillRef>
-          <a:effectRef idx="0">
-            <a:scrgbClr r="0" g="0" b="0"/>
-          </a:effectRef>
-          <a:fontRef idx="minor">
-            <a:schemeClr val="tx1"/>
-          </a:fontRef>
-        </p:style>
-      </p:cxnSp>
-      <p:sp>
-        <p:nvSpPr>
-          <p:cNvPr id="340" name="TextBox 339">
-            <a:extLst>
-              <a:ext uri="{FF2B5EF4-FFF2-40B4-BE49-F238E27FC236}">
-                <a16:creationId xmlns:a16="http://schemas.microsoft.com/office/drawing/2014/main" id="{7D2D64A7-DA64-1A95-8742-E1B99BD36136}"/>
-              </a:ext>
-            </a:extLst>
-          </p:cNvPr>
-          <p:cNvSpPr txBox="1"/>
-          <p:nvPr/>
-        </p:nvSpPr>
-        <p:spPr>
-          <a:xfrm>
-            <a:off x="457326" y="3141427"/>
-            <a:ext cx="1163011" cy="369332"/>
-          </a:xfrm>
-          <a:prstGeom prst="rect">
-            <a:avLst/>
-          </a:prstGeom>
-          <a:noFill/>
-        </p:spPr>
-        <p:txBody>
-          <a:bodyPr wrap="none" rtlCol="0">
-            <a:spAutoFit/>
-          </a:bodyPr>
-          <a:lstStyle/>
-          <a:p>
-            <a:r>
-              <a:rPr lang="en-US" dirty="0">
-                <a:solidFill>
-                  <a:schemeClr val="tx1">
-                    <a:lumMod val="65000"/>
-                    <a:lumOff val="35000"/>
-                  </a:schemeClr>
-                </a:solidFill>
-              </a:rPr>
-              <a:t>OS Kernel</a:t>
-            </a:r>
-          </a:p>
-        </p:txBody>
-      </p:sp>
       <p:sp>
         <p:nvSpPr>
           <p:cNvPr id="341" name="TextBox 340">
@@ -3733,10 +3658,10 @@
       </p:sp>
       <p:sp>
         <p:nvSpPr>
-          <p:cNvPr id="342" name="TextBox 341">
+          <p:cNvPr id="347" name="TextBox 346">
             <a:extLst>
               <a:ext uri="{FF2B5EF4-FFF2-40B4-BE49-F238E27FC236}">
-                <a16:creationId xmlns:a16="http://schemas.microsoft.com/office/drawing/2014/main" id="{930836F8-28DA-D2D0-DA03-02F670A604F0}"/>
+                <a16:creationId xmlns:a16="http://schemas.microsoft.com/office/drawing/2014/main" id="{E28681F4-7788-5472-B415-00395EFEFC7D}"/>
               </a:ext>
             </a:extLst>
           </p:cNvPr>
@@ -3745,7 +3670,101 @@
         </p:nvSpPr>
         <p:spPr>
           <a:xfrm>
-            <a:off x="197946" y="2310430"/>
+            <a:off x="4234577" y="-85539"/>
+            <a:ext cx="1037085" cy="369332"/>
+          </a:xfrm>
+          <a:prstGeom prst="rect">
+            <a:avLst/>
+          </a:prstGeom>
+          <a:noFill/>
+        </p:spPr>
+        <p:txBody>
+          <a:bodyPr wrap="square" rtlCol="0">
+            <a:spAutoFit/>
+          </a:bodyPr>
+          <a:lstStyle/>
+          <a:p>
+            <a:r>
+              <a:rPr lang="en-US" b="1" dirty="0"/>
+              <a:t>REE</a:t>
+            </a:r>
+            <a:r>
+              <a:rPr lang="en-US" dirty="0"/>
+              <a:t>(</a:t>
+            </a:r>
+            <a:r>
+              <a:rPr lang="en-US" i="1" dirty="0"/>
+              <a:t>PS</a:t>
+            </a:r>
+            <a:r>
+              <a:rPr lang="en-US" dirty="0"/>
+              <a:t>)</a:t>
+            </a:r>
+          </a:p>
+        </p:txBody>
+      </p:sp>
+      <p:sp>
+        <p:nvSpPr>
+          <p:cNvPr id="348" name="TextBox 347">
+            <a:extLst>
+              <a:ext uri="{FF2B5EF4-FFF2-40B4-BE49-F238E27FC236}">
+                <a16:creationId xmlns:a16="http://schemas.microsoft.com/office/drawing/2014/main" id="{E7646C79-71F1-17D4-F88E-89B1A54A9529}"/>
+              </a:ext>
+            </a:extLst>
+          </p:cNvPr>
+          <p:cNvSpPr txBox="1"/>
+          <p:nvPr/>
+        </p:nvSpPr>
+        <p:spPr>
+          <a:xfrm>
+            <a:off x="6454780" y="-74465"/>
+            <a:ext cx="1393276" cy="369332"/>
+          </a:xfrm>
+          <a:prstGeom prst="rect">
+            <a:avLst/>
+          </a:prstGeom>
+          <a:noFill/>
+        </p:spPr>
+        <p:txBody>
+          <a:bodyPr wrap="square" rtlCol="0">
+            <a:spAutoFit/>
+          </a:bodyPr>
+          <a:lstStyle/>
+          <a:p>
+            <a:r>
+              <a:rPr lang="en-US" b="1" dirty="0"/>
+              <a:t>TEE </a:t>
+            </a:r>
+            <a:r>
+              <a:rPr lang="en-US" dirty="0"/>
+              <a:t>(</a:t>
+            </a:r>
+            <a:r>
+              <a:rPr lang="en-US" i="1" dirty="0"/>
+              <a:t>FPGA</a:t>
+            </a:r>
+            <a:r>
+              <a:rPr lang="en-US" dirty="0"/>
+              <a:t>)</a:t>
+            </a:r>
+          </a:p>
+        </p:txBody>
+      </p:sp>
+      <p:sp>
+        <p:nvSpPr>
+          <p:cNvPr id="357" name="TextBox 356">
+            <a:extLst>
+              <a:ext uri="{FF2B5EF4-FFF2-40B4-BE49-F238E27FC236}">
+                <a16:creationId xmlns:a16="http://schemas.microsoft.com/office/drawing/2014/main" id="{E916A360-99C1-CDE2-39E9-2878319E6384}"/>
+              </a:ext>
+            </a:extLst>
+          </p:cNvPr>
+          <p:cNvSpPr txBox="1"/>
+          <p:nvPr/>
+        </p:nvSpPr>
+        <p:spPr>
+          <a:xfrm>
+            <a:off x="1946638" y="2310430"/>
             <a:ext cx="1500347" cy="646331"/>
           </a:xfrm>
           <a:prstGeom prst="rect">
@@ -3769,7 +3788,7 @@
                   </a:schemeClr>
                 </a:solidFill>
               </a:rPr>
-              <a:t>Untrusted </a:t>
+              <a:t>Trusted </a:t>
             </a:r>
           </a:p>
           <a:p>
@@ -3796,368 +3815,12 @@
           </a:p>
         </p:txBody>
       </p:sp>
-      <p:pic>
-        <p:nvPicPr>
-          <p:cNvPr id="343" name="Picture 342">
+      <p:sp>
+        <p:nvSpPr>
+          <p:cNvPr id="370" name="Rectangle 369">
             <a:extLst>
               <a:ext uri="{FF2B5EF4-FFF2-40B4-BE49-F238E27FC236}">
-                <a16:creationId xmlns:a16="http://schemas.microsoft.com/office/drawing/2014/main" id="{5793A1FF-B880-96D8-A4EE-16281EF0606D}"/>
-              </a:ext>
-            </a:extLst>
-          </p:cNvPr>
-          <p:cNvPicPr>
-            <a:picLocks noChangeAspect="1"/>
-          </p:cNvPicPr>
-          <p:nvPr/>
-        </p:nvPicPr>
-        <p:blipFill>
-          <a:blip r:embed="rId3"/>
-          <a:stretch>
-            <a:fillRect/>
-          </a:stretch>
-        </p:blipFill>
-        <p:spPr>
-          <a:xfrm>
-            <a:off x="125612" y="3999114"/>
-            <a:ext cx="476250" cy="304800"/>
-          </a:xfrm>
-          <a:prstGeom prst="rect">
-            <a:avLst/>
-          </a:prstGeom>
-        </p:spPr>
-      </p:pic>
-      <p:pic>
-        <p:nvPicPr>
-          <p:cNvPr id="344" name="Picture 343">
-            <a:extLst>
-              <a:ext uri="{FF2B5EF4-FFF2-40B4-BE49-F238E27FC236}">
-                <a16:creationId xmlns:a16="http://schemas.microsoft.com/office/drawing/2014/main" id="{BDA21244-4B20-F7DA-D66B-EBC1B2DE1C36}"/>
-              </a:ext>
-            </a:extLst>
-          </p:cNvPr>
-          <p:cNvPicPr>
-            <a:picLocks noChangeAspect="1"/>
-          </p:cNvPicPr>
-          <p:nvPr/>
-        </p:nvPicPr>
-        <p:blipFill>
-          <a:blip r:embed="rId4"/>
-          <a:stretch>
-            <a:fillRect/>
-          </a:stretch>
-        </p:blipFill>
-        <p:spPr>
-          <a:xfrm>
-            <a:off x="1752193" y="3999114"/>
-            <a:ext cx="270809" cy="301885"/>
-          </a:xfrm>
-          <a:prstGeom prst="rect">
-            <a:avLst/>
-          </a:prstGeom>
-        </p:spPr>
-      </p:pic>
-      <p:pic>
-        <p:nvPicPr>
-          <p:cNvPr id="345" name="Picture 344">
-            <a:extLst>
-              <a:ext uri="{FF2B5EF4-FFF2-40B4-BE49-F238E27FC236}">
-                <a16:creationId xmlns:a16="http://schemas.microsoft.com/office/drawing/2014/main" id="{523F35E0-A14E-A907-EF2E-837382F9DAB3}"/>
-              </a:ext>
-            </a:extLst>
-          </p:cNvPr>
-          <p:cNvPicPr>
-            <a:picLocks noChangeAspect="1"/>
-          </p:cNvPicPr>
-          <p:nvPr/>
-        </p:nvPicPr>
-        <p:blipFill>
-          <a:blip r:embed="rId5"/>
-          <a:stretch>
-            <a:fillRect/>
-          </a:stretch>
-        </p:blipFill>
-        <p:spPr>
-          <a:xfrm>
-            <a:off x="3260553" y="3999114"/>
-            <a:ext cx="337106" cy="301886"/>
-          </a:xfrm>
-          <a:prstGeom prst="rect">
-            <a:avLst/>
-          </a:prstGeom>
-        </p:spPr>
-      </p:pic>
-      <p:sp>
-        <p:nvSpPr>
-          <p:cNvPr id="347" name="TextBox 346">
-            <a:extLst>
-              <a:ext uri="{FF2B5EF4-FFF2-40B4-BE49-F238E27FC236}">
-                <a16:creationId xmlns:a16="http://schemas.microsoft.com/office/drawing/2014/main" id="{E28681F4-7788-5472-B415-00395EFEFC7D}"/>
-              </a:ext>
-            </a:extLst>
-          </p:cNvPr>
-          <p:cNvSpPr txBox="1"/>
-          <p:nvPr/>
-        </p:nvSpPr>
-        <p:spPr>
-          <a:xfrm>
-            <a:off x="4234577" y="-85539"/>
-            <a:ext cx="1037085" cy="369332"/>
-          </a:xfrm>
-          <a:prstGeom prst="rect">
-            <a:avLst/>
-          </a:prstGeom>
-          <a:noFill/>
-        </p:spPr>
-        <p:txBody>
-          <a:bodyPr wrap="square" rtlCol="0">
-            <a:spAutoFit/>
-          </a:bodyPr>
-          <a:lstStyle/>
-          <a:p>
-            <a:r>
-              <a:rPr lang="en-US" b="1" dirty="0"/>
-              <a:t>REE</a:t>
-            </a:r>
-            <a:r>
-              <a:rPr lang="en-US" dirty="0"/>
-              <a:t>(</a:t>
-            </a:r>
-            <a:r>
-              <a:rPr lang="en-US" i="1" dirty="0"/>
-              <a:t>PS</a:t>
-            </a:r>
-            <a:r>
-              <a:rPr lang="en-US" dirty="0"/>
-              <a:t>)</a:t>
-            </a:r>
-          </a:p>
-        </p:txBody>
-      </p:sp>
-      <p:sp>
-        <p:nvSpPr>
-          <p:cNvPr id="348" name="TextBox 347">
-            <a:extLst>
-              <a:ext uri="{FF2B5EF4-FFF2-40B4-BE49-F238E27FC236}">
-                <a16:creationId xmlns:a16="http://schemas.microsoft.com/office/drawing/2014/main" id="{E7646C79-71F1-17D4-F88E-89B1A54A9529}"/>
-              </a:ext>
-            </a:extLst>
-          </p:cNvPr>
-          <p:cNvSpPr txBox="1"/>
-          <p:nvPr/>
-        </p:nvSpPr>
-        <p:spPr>
-          <a:xfrm>
-            <a:off x="6454780" y="-74465"/>
-            <a:ext cx="1393276" cy="369332"/>
-          </a:xfrm>
-          <a:prstGeom prst="rect">
-            <a:avLst/>
-          </a:prstGeom>
-          <a:noFill/>
-        </p:spPr>
-        <p:txBody>
-          <a:bodyPr wrap="square" rtlCol="0">
-            <a:spAutoFit/>
-          </a:bodyPr>
-          <a:lstStyle/>
-          <a:p>
-            <a:r>
-              <a:rPr lang="en-US" b="1" dirty="0"/>
-              <a:t>TEE </a:t>
-            </a:r>
-            <a:r>
-              <a:rPr lang="en-US" dirty="0"/>
-              <a:t>(</a:t>
-            </a:r>
-            <a:r>
-              <a:rPr lang="en-US" i="1" dirty="0"/>
-              <a:t>FPGA</a:t>
-            </a:r>
-            <a:r>
-              <a:rPr lang="en-US" dirty="0"/>
-              <a:t>)</a:t>
-            </a:r>
-          </a:p>
-        </p:txBody>
-      </p:sp>
-      <p:cxnSp>
-        <p:nvCxnSpPr>
-          <p:cNvPr id="349" name="Straight Connector 348">
-            <a:extLst>
-              <a:ext uri="{FF2B5EF4-FFF2-40B4-BE49-F238E27FC236}">
-                <a16:creationId xmlns:a16="http://schemas.microsoft.com/office/drawing/2014/main" id="{F1919514-F88E-B59D-E32F-F68140C270DA}"/>
-              </a:ext>
-            </a:extLst>
-          </p:cNvPr>
-          <p:cNvCxnSpPr>
-            <a:cxnSpLocks/>
-          </p:cNvCxnSpPr>
-          <p:nvPr/>
-        </p:nvCxnSpPr>
-        <p:spPr>
-          <a:xfrm>
-            <a:off x="3806182" y="3060742"/>
-            <a:ext cx="1817783" cy="0"/>
-          </a:xfrm>
-          <a:prstGeom prst="line">
-            <a:avLst/>
-          </a:prstGeom>
-          <a:ln w="28575" cap="flat" cmpd="sng" algn="ctr">
-            <a:solidFill>
-              <a:schemeClr val="dk1"/>
-            </a:solidFill>
-            <a:prstDash val="dash"/>
-            <a:round/>
-            <a:headEnd type="none" w="med" len="med"/>
-            <a:tailEnd type="none" w="med" len="med"/>
-          </a:ln>
-        </p:spPr>
-        <p:style>
-          <a:lnRef idx="0">
-            <a:scrgbClr r="0" g="0" b="0"/>
-          </a:lnRef>
-          <a:fillRef idx="0">
-            <a:scrgbClr r="0" g="0" b="0"/>
-          </a:fillRef>
-          <a:effectRef idx="0">
-            <a:scrgbClr r="0" g="0" b="0"/>
-          </a:effectRef>
-          <a:fontRef idx="minor">
-            <a:schemeClr val="tx1"/>
-          </a:fontRef>
-        </p:style>
-      </p:cxnSp>
-      <p:sp>
-        <p:nvSpPr>
-          <p:cNvPr id="350" name="TextBox 349">
-            <a:extLst>
-              <a:ext uri="{FF2B5EF4-FFF2-40B4-BE49-F238E27FC236}">
-                <a16:creationId xmlns:a16="http://schemas.microsoft.com/office/drawing/2014/main" id="{96DED56F-CCD3-21C6-6423-5F9073CD3B2C}"/>
-              </a:ext>
-            </a:extLst>
-          </p:cNvPr>
-          <p:cNvSpPr txBox="1"/>
-          <p:nvPr/>
-        </p:nvSpPr>
-        <p:spPr>
-          <a:xfrm>
-            <a:off x="4145326" y="3304694"/>
-            <a:ext cx="1163011" cy="369332"/>
-          </a:xfrm>
-          <a:prstGeom prst="rect">
-            <a:avLst/>
-          </a:prstGeom>
-          <a:noFill/>
-        </p:spPr>
-        <p:txBody>
-          <a:bodyPr wrap="none" rtlCol="0">
-            <a:spAutoFit/>
-          </a:bodyPr>
-          <a:lstStyle/>
-          <a:p>
-            <a:r>
-              <a:rPr lang="en-US" dirty="0"/>
-              <a:t>OS Kernel</a:t>
-            </a:r>
-          </a:p>
-        </p:txBody>
-      </p:sp>
-      <p:pic>
-        <p:nvPicPr>
-          <p:cNvPr id="351" name="Picture 350">
-            <a:extLst>
-              <a:ext uri="{FF2B5EF4-FFF2-40B4-BE49-F238E27FC236}">
-                <a16:creationId xmlns:a16="http://schemas.microsoft.com/office/drawing/2014/main" id="{846CAEFA-2FA1-B704-6742-924E2B840482}"/>
-              </a:ext>
-            </a:extLst>
-          </p:cNvPr>
-          <p:cNvPicPr>
-            <a:picLocks noChangeAspect="1"/>
-          </p:cNvPicPr>
-          <p:nvPr/>
-        </p:nvPicPr>
-        <p:blipFill>
-          <a:blip r:embed="rId3"/>
-          <a:stretch>
-            <a:fillRect/>
-          </a:stretch>
-        </p:blipFill>
-        <p:spPr>
-          <a:xfrm>
-            <a:off x="4505154" y="3999114"/>
-            <a:ext cx="476250" cy="304800"/>
-          </a:xfrm>
-          <a:prstGeom prst="rect">
-            <a:avLst/>
-          </a:prstGeom>
-        </p:spPr>
-      </p:pic>
-      <p:pic>
-        <p:nvPicPr>
-          <p:cNvPr id="352" name="Picture 351">
-            <a:extLst>
-              <a:ext uri="{FF2B5EF4-FFF2-40B4-BE49-F238E27FC236}">
-                <a16:creationId xmlns:a16="http://schemas.microsoft.com/office/drawing/2014/main" id="{BD939624-4926-1C62-15FD-E3C5AC2AB4F2}"/>
-              </a:ext>
-            </a:extLst>
-          </p:cNvPr>
-          <p:cNvPicPr>
-            <a:picLocks noChangeAspect="1"/>
-          </p:cNvPicPr>
-          <p:nvPr/>
-        </p:nvPicPr>
-        <p:blipFill>
-          <a:blip r:embed="rId4"/>
-          <a:stretch>
-            <a:fillRect/>
-          </a:stretch>
-        </p:blipFill>
-        <p:spPr>
-          <a:xfrm>
-            <a:off x="5804049" y="3999114"/>
-            <a:ext cx="270809" cy="301885"/>
-          </a:xfrm>
-          <a:prstGeom prst="rect">
-            <a:avLst/>
-          </a:prstGeom>
-        </p:spPr>
-      </p:pic>
-      <p:pic>
-        <p:nvPicPr>
-          <p:cNvPr id="353" name="Picture 352">
-            <a:extLst>
-              <a:ext uri="{FF2B5EF4-FFF2-40B4-BE49-F238E27FC236}">
-                <a16:creationId xmlns:a16="http://schemas.microsoft.com/office/drawing/2014/main" id="{DEB9E940-EBA6-2700-0320-11E6EEFB8859}"/>
-              </a:ext>
-            </a:extLst>
-          </p:cNvPr>
-          <p:cNvPicPr>
-            <a:picLocks noChangeAspect="1"/>
-          </p:cNvPicPr>
-          <p:nvPr/>
-        </p:nvPicPr>
-        <p:blipFill>
-          <a:blip r:embed="rId5"/>
-          <a:stretch>
-            <a:fillRect/>
-          </a:stretch>
-        </p:blipFill>
-        <p:spPr>
-          <a:xfrm>
-            <a:off x="6452849" y="3999114"/>
-            <a:ext cx="337106" cy="301886"/>
-          </a:xfrm>
-          <a:prstGeom prst="rect">
-            <a:avLst/>
-          </a:prstGeom>
-        </p:spPr>
-      </p:pic>
-      <p:sp>
-        <p:nvSpPr>
-          <p:cNvPr id="354" name="Rectangle 353">
-            <a:extLst>
-              <a:ext uri="{FF2B5EF4-FFF2-40B4-BE49-F238E27FC236}">
-                <a16:creationId xmlns:a16="http://schemas.microsoft.com/office/drawing/2014/main" id="{2C7431D1-17ED-1CC8-38FA-CEAD6A090B87}"/>
+                <a16:creationId xmlns:a16="http://schemas.microsoft.com/office/drawing/2014/main" id="{9BF2C618-2BB0-B48E-78CE-86C446E9A305}"/>
               </a:ext>
             </a:extLst>
           </p:cNvPr>
@@ -4165,18 +3828,33 @@
           <p:nvPr/>
         </p:nvSpPr>
         <p:spPr>
-          <a:xfrm rot="16200000">
-            <a:off x="4552695" y="1737869"/>
-            <a:ext cx="3400389" cy="420624"/>
+          <a:xfrm>
+            <a:off x="5619454" y="3986563"/>
+            <a:ext cx="1262113" cy="330394"/>
           </a:xfrm>
           <a:prstGeom prst="rect">
             <a:avLst/>
           </a:prstGeom>
-          <a:noFill/>
+          <a:solidFill>
+            <a:schemeClr val="accent6">
+              <a:lumMod val="20000"/>
+              <a:lumOff val="80000"/>
+            </a:schemeClr>
+          </a:solidFill>
           <a:ln w="28575">
             <a:solidFill>
               <a:schemeClr val="tx1"/>
             </a:solidFill>
+            <a:prstDash val="solid"/>
+            <a:extLst>
+              <a:ext uri="{C807C97D-BFC1-408E-A445-0C87EB9F89A2}">
+                <ask:lineSketchStyleProps xmlns:ask="http://schemas.microsoft.com/office/drawing/2018/sketchyshapes">
+                  <ask:type>
+                    <ask:lineSketchNone/>
+                  </ask:type>
+                </ask:lineSketchStyleProps>
+              </a:ext>
+            </a:extLst>
           </a:ln>
         </p:spPr>
         <p:style>
@@ -4200,24 +3878,105 @@
           <a:lstStyle/>
           <a:p>
             <a:pPr algn="ctr"/>
+            <a:endParaRPr lang="en-US" baseline="-25000" dirty="0"/>
+          </a:p>
+        </p:txBody>
+      </p:sp>
+      <p:sp>
+        <p:nvSpPr>
+          <p:cNvPr id="377" name="TextBox 376">
+            <a:extLst>
+              <a:ext uri="{FF2B5EF4-FFF2-40B4-BE49-F238E27FC236}">
+                <a16:creationId xmlns:a16="http://schemas.microsoft.com/office/drawing/2014/main" id="{39D224A1-D83C-C914-48DB-4A999E6D56F4}"/>
+              </a:ext>
+            </a:extLst>
+          </p:cNvPr>
+          <p:cNvSpPr txBox="1"/>
+          <p:nvPr/>
+        </p:nvSpPr>
+        <p:spPr>
+          <a:xfrm>
+            <a:off x="1088514" y="4265143"/>
+            <a:ext cx="1497076" cy="369332"/>
+          </a:xfrm>
+          <a:prstGeom prst="rect">
+            <a:avLst/>
+          </a:prstGeom>
+          <a:noFill/>
+        </p:spPr>
+        <p:txBody>
+          <a:bodyPr wrap="none" rtlCol="0">
+            <a:spAutoFit/>
+          </a:bodyPr>
+          <a:lstStyle/>
+          <a:p>
             <a:r>
               <a:rPr lang="en-US" dirty="0">
                 <a:solidFill>
-                  <a:schemeClr val="tx1"/>
+                  <a:schemeClr val="tx1">
+                    <a:lumMod val="65000"/>
+                    <a:lumOff val="35000"/>
+                  </a:schemeClr>
                 </a:solidFill>
               </a:rPr>
-              <a:t>     Isolated CPU, Memory, Cache</a:t>
-            </a:r>
-            <a:endParaRPr lang="en-US" dirty="0"/>
-          </a:p>
-        </p:txBody>
-      </p:sp>
-      <p:sp>
-        <p:nvSpPr>
-          <p:cNvPr id="355" name="Rectangle 354">
+              <a:t>General TEEs</a:t>
+            </a:r>
+          </a:p>
+        </p:txBody>
+      </p:sp>
+      <p:sp>
+        <p:nvSpPr>
+          <p:cNvPr id="378" name="TextBox 377">
             <a:extLst>
               <a:ext uri="{FF2B5EF4-FFF2-40B4-BE49-F238E27FC236}">
-                <a16:creationId xmlns:a16="http://schemas.microsoft.com/office/drawing/2014/main" id="{06C0C959-3086-6794-E7D8-1372B09C77B9}"/>
+                <a16:creationId xmlns:a16="http://schemas.microsoft.com/office/drawing/2014/main" id="{4245879D-FF1B-C903-CF26-6AFF3B3A3171}"/>
+              </a:ext>
+            </a:extLst>
+          </p:cNvPr>
+          <p:cNvSpPr txBox="1"/>
+          <p:nvPr/>
+        </p:nvSpPr>
+        <p:spPr>
+          <a:xfrm>
+            <a:off x="5242859" y="4265143"/>
+            <a:ext cx="2018309" cy="369333"/>
+          </a:xfrm>
+          <a:prstGeom prst="rect">
+            <a:avLst/>
+          </a:prstGeom>
+          <a:noFill/>
+        </p:spPr>
+        <p:txBody>
+          <a:bodyPr wrap="none" rtlCol="0">
+            <a:spAutoFit/>
+          </a:bodyPr>
+          <a:lstStyle/>
+          <a:p>
+            <a:r>
+              <a:rPr lang="en-US" b="1" dirty="0">
+                <a:latin typeface="Abadi MT Condensed Light" panose="020B0306030101010103" pitchFamily="34" charset="77"/>
+              </a:rPr>
+              <a:t>BYOT</a:t>
+            </a:r>
+            <a:r>
+              <a:rPr lang="en-US" sz="1600" b="1" dirty="0">
+                <a:latin typeface="Abadi MT Condensed Light" panose="020B0306030101010103" pitchFamily="34" charset="77"/>
+              </a:rPr>
+              <a:t>EE</a:t>
+            </a:r>
+            <a:r>
+              <a:rPr lang="en-US" b="1" dirty="0"/>
+              <a:t> Framework</a:t>
+            </a:r>
+          </a:p>
+        </p:txBody>
+      </p:sp>
+      <p:sp>
+        <p:nvSpPr>
+          <p:cNvPr id="379" name="Rectangle 378">
+            <a:extLst>
+              <a:ext uri="{FF2B5EF4-FFF2-40B4-BE49-F238E27FC236}">
+                <a16:creationId xmlns:a16="http://schemas.microsoft.com/office/drawing/2014/main" id="{CFD73C85-32AE-808E-B462-81C264C84DD0}"/>
               </a:ext>
             </a:extLst>
           </p:cNvPr>
@@ -4225,18 +3984,22 @@
           <p:nvPr/>
         </p:nvSpPr>
         <p:spPr>
-          <a:xfrm rot="16200000">
-            <a:off x="4972975" y="1738821"/>
-            <a:ext cx="3402901" cy="421232"/>
+          <a:xfrm>
+            <a:off x="24898" y="247986"/>
+            <a:ext cx="3635566" cy="1576650"/>
           </a:xfrm>
           <a:prstGeom prst="rect">
             <a:avLst/>
           </a:prstGeom>
           <a:noFill/>
-          <a:ln w="28575">
+          <a:ln w="19050">
             <a:solidFill>
-              <a:schemeClr val="tx1"/>
+              <a:schemeClr val="tx2">
+                <a:lumMod val="50000"/>
+                <a:lumOff val="50000"/>
+              </a:schemeClr>
             </a:solidFill>
+            <a:prstDash val="lgDash"/>
           </a:ln>
         </p:spPr>
         <p:style>
@@ -4260,25 +4023,165 @@
           <a:lstStyle/>
           <a:p>
             <a:pPr algn="ctr"/>
-            <a:r>
-              <a:rPr lang="en-US" dirty="0">
+            <a:endParaRPr lang="en-US">
+              <a:solidFill>
+                <a:schemeClr val="accent4">
+                  <a:lumMod val="60000"/>
+                  <a:lumOff val="40000"/>
+                </a:schemeClr>
+              </a:solidFill>
+            </a:endParaRPr>
+          </a:p>
+        </p:txBody>
+      </p:sp>
+      <p:sp>
+        <p:nvSpPr>
+          <p:cNvPr id="380" name="TextBox 379">
+            <a:extLst>
+              <a:ext uri="{FF2B5EF4-FFF2-40B4-BE49-F238E27FC236}">
+                <a16:creationId xmlns:a16="http://schemas.microsoft.com/office/drawing/2014/main" id="{7AEF56F1-28EA-B48A-1D3D-EFC9FE9DF61B}"/>
+              </a:ext>
+            </a:extLst>
+          </p:cNvPr>
+          <p:cNvSpPr txBox="1"/>
+          <p:nvPr/>
+        </p:nvSpPr>
+        <p:spPr>
+          <a:xfrm>
+            <a:off x="61318" y="574291"/>
+            <a:ext cx="3579725" cy="1292662"/>
+          </a:xfrm>
+          <a:prstGeom prst="rect">
+            <a:avLst/>
+          </a:prstGeom>
+          <a:noFill/>
+        </p:spPr>
+        <p:txBody>
+          <a:bodyPr wrap="square">
+            <a:spAutoFit/>
+          </a:bodyPr>
+          <a:lstStyle/>
+          <a:p>
+            <a:r>
+              <a:rPr lang="en-US" sz="1800" dirty="0"/>
+              <a:t>1</a:t>
+            </a:r>
+            <a:r>
+              <a:rPr lang="en-US" sz="1800" dirty="0">
+                <a:latin typeface="Abadi MT Condensed Light" panose="020B0306030101010103" pitchFamily="34" charset="77"/>
+              </a:rPr>
+              <a:t>. </a:t>
+            </a:r>
+            <a:r>
+              <a:rPr lang="en-US" sz="1800" b="1" dirty="0">
+                <a:latin typeface="Abadi MT Condensed Light" panose="020B0306030101010103" pitchFamily="34" charset="77"/>
+              </a:rPr>
+              <a:t>FCM</a:t>
+            </a:r>
+            <a:r>
+              <a:rPr lang="en-US" sz="1800" dirty="0">
+                <a:latin typeface="Abadi MT Condensed Light" panose="020B0306030101010103" pitchFamily="34" charset="77"/>
+              </a:rPr>
+              <a:t>: </a:t>
+            </a:r>
+            <a:r>
+              <a:rPr lang="en-US" sz="1400" dirty="0"/>
+              <a:t>Configures and measures the TEE 	FPGA hardware- </a:t>
+            </a:r>
+            <a:r>
+              <a:rPr lang="en-US" sz="1400" b="1" i="1" dirty="0"/>
+              <a:t>A</a:t>
+            </a:r>
+            <a:r>
+              <a:rPr lang="en-US" sz="1400" b="1" i="1" baseline="-25000" dirty="0"/>
+              <a:t>H</a:t>
+            </a:r>
+          </a:p>
+          <a:p>
+            <a:r>
+              <a:rPr lang="en-US" sz="1800" dirty="0">
+                <a:solidFill>
+                  <a:schemeClr val="tx1"/>
+                </a:solidFill>
+              </a:rPr>
+              <a:t>2. </a:t>
+            </a:r>
+            <a:r>
+              <a:rPr lang="en-US" sz="1800" b="1" dirty="0">
                 <a:solidFill>
                   <a:schemeClr val="tx1"/>
                 </a:solidFill>
                 <a:latin typeface="Abadi MT Condensed Light" panose="020B0306030101010103" pitchFamily="34" charset="77"/>
               </a:rPr>
-              <a:t>FIRMWARE</a:t>
-            </a:r>
-            <a:endParaRPr lang="en-US" dirty="0"/>
-          </a:p>
-        </p:txBody>
-      </p:sp>
-      <p:sp>
-        <p:nvSpPr>
-          <p:cNvPr id="356" name="TextBox 355">
+              <a:t>HW-ATT: </a:t>
+            </a:r>
+            <a:r>
+              <a:rPr lang="en-US" sz="1400" dirty="0">
+                <a:solidFill>
+                  <a:schemeClr val="tx1"/>
+                </a:solidFill>
+              </a:rPr>
+              <a:t>Measures TEE software   	components - </a:t>
+            </a:r>
+            <a:r>
+              <a:rPr lang="en-US" sz="1400" b="1" i="1" dirty="0">
+                <a:solidFill>
+                  <a:schemeClr val="tx1"/>
+                </a:solidFill>
+              </a:rPr>
+              <a:t>A</a:t>
+            </a:r>
+            <a:r>
+              <a:rPr lang="en-US" sz="1400" b="1" i="1" baseline="-25000" dirty="0">
+                <a:solidFill>
+                  <a:schemeClr val="tx1"/>
+                </a:solidFill>
+              </a:rPr>
+              <a:t>S</a:t>
+            </a:r>
+            <a:r>
+              <a:rPr lang="en-US" sz="1400" b="1" i="1" dirty="0">
+                <a:solidFill>
+                  <a:schemeClr val="tx1"/>
+                </a:solidFill>
+              </a:rPr>
+              <a:t> </a:t>
+            </a:r>
+            <a:r>
+              <a:rPr lang="en-US" sz="1400" dirty="0"/>
+              <a:t>and combines with</a:t>
+            </a:r>
+          </a:p>
+          <a:p>
+            <a:r>
+              <a:rPr lang="en-US" sz="1400" b="1" i="1" dirty="0"/>
+              <a:t>	A</a:t>
+            </a:r>
+            <a:r>
+              <a:rPr lang="en-US" sz="1400" b="1" i="1" baseline="-25000" dirty="0"/>
+              <a:t>H</a:t>
+            </a:r>
+            <a:r>
+              <a:rPr lang="en-US" sz="1400" i="1" dirty="0"/>
+              <a:t>  for verification - </a:t>
+            </a:r>
+            <a:r>
+              <a:rPr lang="en-US" sz="1400" b="1" i="1" dirty="0"/>
+              <a:t>A</a:t>
+            </a:r>
+            <a:r>
+              <a:rPr lang="en-US" sz="1400" b="1" i="1" baseline="-25000" dirty="0"/>
+              <a:t>TEE</a:t>
+            </a:r>
+          </a:p>
+        </p:txBody>
+      </p:sp>
+      <p:sp>
+        <p:nvSpPr>
+          <p:cNvPr id="381" name="TextBox 380">
             <a:extLst>
               <a:ext uri="{FF2B5EF4-FFF2-40B4-BE49-F238E27FC236}">
-                <a16:creationId xmlns:a16="http://schemas.microsoft.com/office/drawing/2014/main" id="{8AD09888-147D-1B1D-05EA-3EFC29706E67}"/>
+                <a16:creationId xmlns:a16="http://schemas.microsoft.com/office/drawing/2014/main" id="{945CC5B7-D6F3-8E4F-3F80-B5A6BF0AE087}"/>
               </a:ext>
             </a:extLst>
           </p:cNvPr>
@@ -4287,8 +4190,8 @@
         </p:nvSpPr>
         <p:spPr>
           <a:xfrm>
-            <a:off x="3976659" y="2310430"/>
-            <a:ext cx="1500347" cy="646331"/>
+            <a:off x="567212" y="250903"/>
+            <a:ext cx="2706831" cy="369332"/>
           </a:xfrm>
           <a:prstGeom prst="rect">
             <a:avLst/>
@@ -4301,128 +4204,19 @@
           </a:bodyPr>
           <a:lstStyle/>
           <a:p>
-            <a:pPr algn="ctr"/>
-            <a:r>
-              <a:rPr lang="en-US" i="1" dirty="0"/>
-              <a:t>Untrusted </a:t>
-            </a:r>
-          </a:p>
-          <a:p>
-            <a:pPr algn="ctr"/>
-            <a:r>
-              <a:rPr lang="en-US" i="1" dirty="0"/>
-              <a:t>Application/s</a:t>
-            </a:r>
-            <a:endParaRPr lang="en-US" i="1" baseline="-25000" dirty="0"/>
-          </a:p>
-        </p:txBody>
-      </p:sp>
-      <p:sp>
-        <p:nvSpPr>
-          <p:cNvPr id="357" name="TextBox 356">
+            <a:r>
+              <a:rPr lang="en-US" b="1" i="1" dirty="0"/>
+              <a:t>TEE Trust Establishment</a:t>
+            </a:r>
+          </a:p>
+        </p:txBody>
+      </p:sp>
+      <p:sp>
+        <p:nvSpPr>
+          <p:cNvPr id="383" name="Rectangle 382">
             <a:extLst>
               <a:ext uri="{FF2B5EF4-FFF2-40B4-BE49-F238E27FC236}">
-                <a16:creationId xmlns:a16="http://schemas.microsoft.com/office/drawing/2014/main" id="{E916A360-99C1-CDE2-39E9-2878319E6384}"/>
-              </a:ext>
-            </a:extLst>
-          </p:cNvPr>
-          <p:cNvSpPr txBox="1"/>
-          <p:nvPr/>
-        </p:nvSpPr>
-        <p:spPr>
-          <a:xfrm>
-            <a:off x="1946638" y="2310430"/>
-            <a:ext cx="1500347" cy="646331"/>
-          </a:xfrm>
-          <a:prstGeom prst="rect">
-            <a:avLst/>
-          </a:prstGeom>
-          <a:noFill/>
-        </p:spPr>
-        <p:txBody>
-          <a:bodyPr wrap="none" rtlCol="0">
-            <a:spAutoFit/>
-          </a:bodyPr>
-          <a:lstStyle/>
-          <a:p>
-            <a:pPr algn="ctr"/>
-            <a:r>
-              <a:rPr lang="en-US" i="1" dirty="0">
-                <a:solidFill>
-                  <a:schemeClr val="tx1">
-                    <a:lumMod val="65000"/>
-                    <a:lumOff val="35000"/>
-                  </a:schemeClr>
-                </a:solidFill>
-              </a:rPr>
-              <a:t>Trusted </a:t>
-            </a:r>
-          </a:p>
-          <a:p>
-            <a:pPr algn="ctr"/>
-            <a:r>
-              <a:rPr lang="en-US" i="1" dirty="0">
-                <a:solidFill>
-                  <a:schemeClr val="tx1">
-                    <a:lumMod val="65000"/>
-                    <a:lumOff val="35000"/>
-                  </a:schemeClr>
-                </a:solidFill>
-              </a:rPr>
-              <a:t>Application/s</a:t>
-            </a:r>
-            <a:endParaRPr lang="en-US" i="1" baseline="-25000" dirty="0">
-              <a:solidFill>
-                <a:schemeClr val="tx1">
-                  <a:lumMod val="65000"/>
-                  <a:lumOff val="35000"/>
-                </a:schemeClr>
-              </a:solidFill>
-            </a:endParaRPr>
-          </a:p>
-        </p:txBody>
-      </p:sp>
-      <p:sp>
-        <p:nvSpPr>
-          <p:cNvPr id="358" name="TextBox 357">
-            <a:extLst>
-              <a:ext uri="{FF2B5EF4-FFF2-40B4-BE49-F238E27FC236}">
-                <a16:creationId xmlns:a16="http://schemas.microsoft.com/office/drawing/2014/main" id="{9CE1E259-27C8-96B5-F322-6A741E0A4039}"/>
-              </a:ext>
-            </a:extLst>
-          </p:cNvPr>
-          <p:cNvSpPr txBox="1"/>
-          <p:nvPr/>
-        </p:nvSpPr>
-        <p:spPr>
-          <a:xfrm rot="16200000">
-            <a:off x="6746659" y="1741973"/>
-            <a:ext cx="381836" cy="477054"/>
-          </a:xfrm>
-          <a:prstGeom prst="rect">
-            <a:avLst/>
-          </a:prstGeom>
-          <a:noFill/>
-        </p:spPr>
-        <p:txBody>
-          <a:bodyPr wrap="square" rtlCol="0">
-            <a:spAutoFit/>
-          </a:bodyPr>
-          <a:lstStyle/>
-          <a:p>
-            <a:r>
-              <a:rPr lang="en-US" sz="2500" dirty="0"/>
-              <a:t>…</a:t>
-            </a:r>
-          </a:p>
-        </p:txBody>
-      </p:sp>
-      <p:sp>
-        <p:nvSpPr>
-          <p:cNvPr id="359" name="Rectangle 358">
-            <a:extLst>
-              <a:ext uri="{FF2B5EF4-FFF2-40B4-BE49-F238E27FC236}">
-                <a16:creationId xmlns:a16="http://schemas.microsoft.com/office/drawing/2014/main" id="{EE808548-CB0A-5F36-BEFE-248E61B56C14}"/>
+                <a16:creationId xmlns:a16="http://schemas.microsoft.com/office/drawing/2014/main" id="{4D0AB89E-9134-E455-8346-5899B6211C55}"/>
               </a:ext>
             </a:extLst>
           </p:cNvPr>
@@ -4431,18 +4225,24 @@
         </p:nvSpPr>
         <p:spPr>
           <a:xfrm>
-            <a:off x="7150636" y="247986"/>
-            <a:ext cx="420624" cy="3402903"/>
+            <a:off x="26999" y="3661997"/>
+            <a:ext cx="3635566" cy="329184"/>
           </a:xfrm>
           <a:prstGeom prst="rect">
             <a:avLst/>
           </a:prstGeom>
           <a:solidFill>
-            <a:schemeClr val="bg1"/>
+            <a:schemeClr val="accent2">
+              <a:lumMod val="20000"/>
+              <a:lumOff val="80000"/>
+            </a:schemeClr>
           </a:solidFill>
           <a:ln w="28575">
             <a:solidFill>
-              <a:schemeClr val="tx1"/>
+              <a:schemeClr val="tx1">
+                <a:lumMod val="65000"/>
+                <a:lumOff val="35000"/>
+              </a:schemeClr>
             </a:solidFill>
           </a:ln>
         </p:spPr>
@@ -4467,1077 +4267,6 @@
           <a:lstStyle/>
           <a:p>
             <a:pPr algn="ctr"/>
-            <a:endParaRPr lang="en-US"/>
-          </a:p>
-        </p:txBody>
-      </p:sp>
-      <p:sp>
-        <p:nvSpPr>
-          <p:cNvPr id="360" name="Rectangle 359">
-            <a:extLst>
-              <a:ext uri="{FF2B5EF4-FFF2-40B4-BE49-F238E27FC236}">
-                <a16:creationId xmlns:a16="http://schemas.microsoft.com/office/drawing/2014/main" id="{D45BF61F-857A-3B37-A8E3-5DCCC50A9F88}"/>
-              </a:ext>
-            </a:extLst>
-          </p:cNvPr>
-          <p:cNvSpPr/>
-          <p:nvPr/>
-        </p:nvSpPr>
-        <p:spPr>
-          <a:xfrm rot="16200000">
-            <a:off x="6083412" y="1738822"/>
-            <a:ext cx="3402904" cy="421232"/>
-          </a:xfrm>
-          <a:prstGeom prst="rect">
-            <a:avLst/>
-          </a:prstGeom>
-          <a:solidFill>
-            <a:schemeClr val="bg1"/>
-          </a:solidFill>
-          <a:ln w="28575">
-            <a:solidFill>
-              <a:schemeClr val="tx1"/>
-            </a:solidFill>
-          </a:ln>
-        </p:spPr>
-        <p:style>
-          <a:lnRef idx="2">
-            <a:schemeClr val="accent1">
-              <a:shade val="15000"/>
-            </a:schemeClr>
-          </a:lnRef>
-          <a:fillRef idx="1">
-            <a:schemeClr val="accent1"/>
-          </a:fillRef>
-          <a:effectRef idx="0">
-            <a:schemeClr val="accent1"/>
-          </a:effectRef>
-          <a:fontRef idx="minor">
-            <a:schemeClr val="lt1"/>
-          </a:fontRef>
-        </p:style>
-        <p:txBody>
-          <a:bodyPr rtlCol="0" anchor="ctr"/>
-          <a:lstStyle/>
-          <a:p>
-            <a:pPr algn="ctr"/>
-            <a:r>
-              <a:rPr lang="en-US" dirty="0">
-                <a:solidFill>
-                  <a:schemeClr val="tx1"/>
-                </a:solidFill>
-              </a:rPr>
-              <a:t>     Isolated CPU, Memory, Cache</a:t>
-            </a:r>
-            <a:endParaRPr lang="en-US" dirty="0"/>
-          </a:p>
-        </p:txBody>
-      </p:sp>
-      <p:sp>
-        <p:nvSpPr>
-          <p:cNvPr id="361" name="Rectangle 360">
-            <a:extLst>
-              <a:ext uri="{FF2B5EF4-FFF2-40B4-BE49-F238E27FC236}">
-                <a16:creationId xmlns:a16="http://schemas.microsoft.com/office/drawing/2014/main" id="{78319D1F-AD19-F1D9-6C45-B87558F55B3B}"/>
-              </a:ext>
-            </a:extLst>
-          </p:cNvPr>
-          <p:cNvSpPr/>
-          <p:nvPr/>
-        </p:nvSpPr>
-        <p:spPr>
-          <a:xfrm rot="16200000">
-            <a:off x="6504644" y="1738822"/>
-            <a:ext cx="3402904" cy="421232"/>
-          </a:xfrm>
-          <a:prstGeom prst="rect">
-            <a:avLst/>
-          </a:prstGeom>
-          <a:solidFill>
-            <a:schemeClr val="bg1"/>
-          </a:solidFill>
-          <a:ln w="28575">
-            <a:solidFill>
-              <a:schemeClr val="tx1"/>
-            </a:solidFill>
-          </a:ln>
-        </p:spPr>
-        <p:style>
-          <a:lnRef idx="2">
-            <a:schemeClr val="accent1">
-              <a:shade val="15000"/>
-            </a:schemeClr>
-          </a:lnRef>
-          <a:fillRef idx="1">
-            <a:schemeClr val="accent1"/>
-          </a:fillRef>
-          <a:effectRef idx="0">
-            <a:schemeClr val="accent1"/>
-          </a:effectRef>
-          <a:fontRef idx="minor">
-            <a:schemeClr val="lt1"/>
-          </a:fontRef>
-        </p:style>
-        <p:txBody>
-          <a:bodyPr rtlCol="0" anchor="ctr"/>
-          <a:lstStyle/>
-          <a:p>
-            <a:pPr algn="ctr"/>
-            <a:r>
-              <a:rPr lang="en-US" dirty="0">
-                <a:solidFill>
-                  <a:schemeClr val="tx1"/>
-                </a:solidFill>
-                <a:latin typeface="Abadi MT Condensed Light" panose="020B0306030101010103" pitchFamily="34" charset="77"/>
-              </a:rPr>
-              <a:t>FIRMWARE</a:t>
-            </a:r>
-            <a:endParaRPr lang="en-US" dirty="0">
-              <a:latin typeface="Abadi MT Condensed Light" panose="020B0306030101010103" pitchFamily="34" charset="77"/>
-            </a:endParaRPr>
-          </a:p>
-        </p:txBody>
-      </p:sp>
-      <p:sp>
-        <p:nvSpPr>
-          <p:cNvPr id="362" name="Rectangle 361">
-            <a:extLst>
-              <a:ext uri="{FF2B5EF4-FFF2-40B4-BE49-F238E27FC236}">
-                <a16:creationId xmlns:a16="http://schemas.microsoft.com/office/drawing/2014/main" id="{ABE84E33-2D72-58C9-6919-831F9D322C9C}"/>
-              </a:ext>
-            </a:extLst>
-          </p:cNvPr>
-          <p:cNvSpPr/>
-          <p:nvPr/>
-        </p:nvSpPr>
-        <p:spPr>
-          <a:xfrm>
-            <a:off x="5619455" y="247986"/>
-            <a:ext cx="420624" cy="3402900"/>
-          </a:xfrm>
-          <a:prstGeom prst="rect">
-            <a:avLst/>
-          </a:prstGeom>
-          <a:noFill/>
-          <a:ln w="28575">
-            <a:solidFill>
-              <a:schemeClr val="tx1"/>
-            </a:solidFill>
-          </a:ln>
-        </p:spPr>
-        <p:style>
-          <a:lnRef idx="2">
-            <a:schemeClr val="accent1">
-              <a:shade val="15000"/>
-            </a:schemeClr>
-          </a:lnRef>
-          <a:fillRef idx="1">
-            <a:schemeClr val="accent1"/>
-          </a:fillRef>
-          <a:effectRef idx="0">
-            <a:schemeClr val="accent1"/>
-          </a:effectRef>
-          <a:fontRef idx="minor">
-            <a:schemeClr val="lt1"/>
-          </a:fontRef>
-        </p:style>
-        <p:txBody>
-          <a:bodyPr rtlCol="0" anchor="ctr"/>
-          <a:lstStyle/>
-          <a:p>
-            <a:pPr algn="ctr"/>
-            <a:endParaRPr lang="en-US"/>
-          </a:p>
-        </p:txBody>
-      </p:sp>
-      <p:sp>
-        <p:nvSpPr>
-          <p:cNvPr id="363" name="Rectangle 362">
-            <a:extLst>
-              <a:ext uri="{FF2B5EF4-FFF2-40B4-BE49-F238E27FC236}">
-                <a16:creationId xmlns:a16="http://schemas.microsoft.com/office/drawing/2014/main" id="{DAB50401-FC4F-63EB-8608-023AAC9A69BB}"/>
-              </a:ext>
-            </a:extLst>
-          </p:cNvPr>
-          <p:cNvSpPr/>
-          <p:nvPr/>
-        </p:nvSpPr>
-        <p:spPr>
-          <a:xfrm>
-            <a:off x="6885043" y="247986"/>
-            <a:ext cx="265594" cy="4066460"/>
-          </a:xfrm>
-          <a:prstGeom prst="rect">
-            <a:avLst/>
-          </a:prstGeom>
-          <a:noFill/>
-          <a:ln w="28575">
-            <a:solidFill>
-              <a:schemeClr val="tx1"/>
-            </a:solidFill>
-          </a:ln>
-        </p:spPr>
-        <p:style>
-          <a:lnRef idx="2">
-            <a:schemeClr val="accent1">
-              <a:shade val="15000"/>
-            </a:schemeClr>
-          </a:lnRef>
-          <a:fillRef idx="1">
-            <a:schemeClr val="accent1"/>
-          </a:fillRef>
-          <a:effectRef idx="0">
-            <a:schemeClr val="accent1"/>
-          </a:effectRef>
-          <a:fontRef idx="minor">
-            <a:schemeClr val="lt1"/>
-          </a:fontRef>
-        </p:style>
-        <p:txBody>
-          <a:bodyPr rtlCol="0" anchor="ctr"/>
-          <a:lstStyle/>
-          <a:p>
-            <a:pPr algn="ctr"/>
-            <a:endParaRPr lang="en-US"/>
-          </a:p>
-        </p:txBody>
-      </p:sp>
-      <p:sp>
-        <p:nvSpPr>
-          <p:cNvPr id="364" name="TextBox 363">
-            <a:extLst>
-              <a:ext uri="{FF2B5EF4-FFF2-40B4-BE49-F238E27FC236}">
-                <a16:creationId xmlns:a16="http://schemas.microsoft.com/office/drawing/2014/main" id="{DDB4CE1A-5BC1-DBAF-6021-51665F8C60A1}"/>
-              </a:ext>
-            </a:extLst>
-          </p:cNvPr>
-          <p:cNvSpPr txBox="1"/>
-          <p:nvPr/>
-        </p:nvSpPr>
-        <p:spPr>
-          <a:xfrm rot="16200000">
-            <a:off x="4756889" y="1688257"/>
-            <a:ext cx="2152037" cy="369332"/>
-          </a:xfrm>
-          <a:prstGeom prst="rect">
-            <a:avLst/>
-          </a:prstGeom>
-          <a:noFill/>
-        </p:spPr>
-        <p:txBody>
-          <a:bodyPr wrap="square" rtlCol="0">
-            <a:spAutoFit/>
-          </a:bodyPr>
-          <a:lstStyle/>
-          <a:p>
-            <a:pPr algn="ctr"/>
-            <a:r>
-              <a:rPr lang="en-US" i="1" dirty="0"/>
-              <a:t>Trusted Application</a:t>
-            </a:r>
-            <a:endParaRPr lang="en-US" i="1" baseline="-25000" dirty="0"/>
-          </a:p>
-        </p:txBody>
-      </p:sp>
-      <p:sp>
-        <p:nvSpPr>
-          <p:cNvPr id="365" name="TextBox 364">
-            <a:extLst>
-              <a:ext uri="{FF2B5EF4-FFF2-40B4-BE49-F238E27FC236}">
-                <a16:creationId xmlns:a16="http://schemas.microsoft.com/office/drawing/2014/main" id="{BDA18C57-D438-BA26-68F2-B7A8B51CB8F8}"/>
-              </a:ext>
-            </a:extLst>
-          </p:cNvPr>
-          <p:cNvSpPr txBox="1"/>
-          <p:nvPr/>
-        </p:nvSpPr>
-        <p:spPr>
-          <a:xfrm rot="16200000">
-            <a:off x="6270628" y="1688257"/>
-            <a:ext cx="2152037" cy="369332"/>
-          </a:xfrm>
-          <a:prstGeom prst="rect">
-            <a:avLst/>
-          </a:prstGeom>
-          <a:noFill/>
-        </p:spPr>
-        <p:txBody>
-          <a:bodyPr wrap="square" rtlCol="0">
-            <a:spAutoFit/>
-          </a:bodyPr>
-          <a:lstStyle/>
-          <a:p>
-            <a:pPr algn="ctr"/>
-            <a:r>
-              <a:rPr lang="en-US" i="1" dirty="0"/>
-              <a:t>Trusted Application</a:t>
-            </a:r>
-            <a:endParaRPr lang="en-US" i="1" baseline="-25000" dirty="0"/>
-          </a:p>
-        </p:txBody>
-      </p:sp>
-      <p:sp>
-        <p:nvSpPr>
-          <p:cNvPr id="366" name="Rectangle 365">
-            <a:extLst>
-              <a:ext uri="{FF2B5EF4-FFF2-40B4-BE49-F238E27FC236}">
-                <a16:creationId xmlns:a16="http://schemas.microsoft.com/office/drawing/2014/main" id="{4E6635A9-CD44-E80C-26C1-33BDB91965F8}"/>
-              </a:ext>
-            </a:extLst>
-          </p:cNvPr>
-          <p:cNvSpPr/>
-          <p:nvPr/>
-        </p:nvSpPr>
-        <p:spPr>
-          <a:xfrm>
-            <a:off x="5619455" y="3334251"/>
-            <a:ext cx="1262113" cy="330394"/>
-          </a:xfrm>
-          <a:prstGeom prst="rect">
-            <a:avLst/>
-          </a:prstGeom>
-          <a:solidFill>
-            <a:schemeClr val="bg1">
-              <a:lumMod val="95000"/>
-            </a:schemeClr>
-          </a:solidFill>
-          <a:ln w="28575">
-            <a:solidFill>
-              <a:schemeClr val="tx1"/>
-            </a:solidFill>
-          </a:ln>
-        </p:spPr>
-        <p:style>
-          <a:lnRef idx="2">
-            <a:schemeClr val="accent1">
-              <a:shade val="15000"/>
-            </a:schemeClr>
-          </a:lnRef>
-          <a:fillRef idx="1">
-            <a:schemeClr val="accent1"/>
-          </a:fillRef>
-          <a:effectRef idx="0">
-            <a:schemeClr val="accent1"/>
-          </a:effectRef>
-          <a:fontRef idx="minor">
-            <a:schemeClr val="lt1"/>
-          </a:fontRef>
-        </p:style>
-        <p:txBody>
-          <a:bodyPr rtlCol="0" anchor="ctr"/>
-          <a:lstStyle/>
-          <a:p>
-            <a:pPr algn="ctr"/>
-            <a:r>
-              <a:rPr lang="en-US" dirty="0">
-                <a:solidFill>
-                  <a:schemeClr val="tx1"/>
-                </a:solidFill>
-              </a:rPr>
-              <a:t>Enclave</a:t>
-            </a:r>
-            <a:r>
-              <a:rPr lang="en-US" baseline="-25000" dirty="0">
-                <a:solidFill>
-                  <a:schemeClr val="tx1"/>
-                </a:solidFill>
-              </a:rPr>
-              <a:t>1</a:t>
-            </a:r>
-            <a:endParaRPr lang="en-US" baseline="-25000" dirty="0"/>
-          </a:p>
-        </p:txBody>
-      </p:sp>
-      <p:sp>
-        <p:nvSpPr>
-          <p:cNvPr id="367" name="Rectangle 366">
-            <a:extLst>
-              <a:ext uri="{FF2B5EF4-FFF2-40B4-BE49-F238E27FC236}">
-                <a16:creationId xmlns:a16="http://schemas.microsoft.com/office/drawing/2014/main" id="{01B41EE5-6DAC-A805-11B9-B3825941BFCB}"/>
-              </a:ext>
-            </a:extLst>
-          </p:cNvPr>
-          <p:cNvSpPr/>
-          <p:nvPr/>
-        </p:nvSpPr>
-        <p:spPr>
-          <a:xfrm>
-            <a:off x="7154112" y="3324163"/>
-            <a:ext cx="1262600" cy="330394"/>
-          </a:xfrm>
-          <a:prstGeom prst="rect">
-            <a:avLst/>
-          </a:prstGeom>
-          <a:solidFill>
-            <a:schemeClr val="bg1">
-              <a:lumMod val="95000"/>
-            </a:schemeClr>
-          </a:solidFill>
-          <a:ln w="28575">
-            <a:solidFill>
-              <a:schemeClr val="tx1"/>
-            </a:solidFill>
-          </a:ln>
-        </p:spPr>
-        <p:style>
-          <a:lnRef idx="2">
-            <a:schemeClr val="accent1">
-              <a:shade val="15000"/>
-            </a:schemeClr>
-          </a:lnRef>
-          <a:fillRef idx="1">
-            <a:schemeClr val="accent1"/>
-          </a:fillRef>
-          <a:effectRef idx="0">
-            <a:schemeClr val="accent1"/>
-          </a:effectRef>
-          <a:fontRef idx="minor">
-            <a:schemeClr val="lt1"/>
-          </a:fontRef>
-        </p:style>
-        <p:txBody>
-          <a:bodyPr rtlCol="0" anchor="ctr"/>
-          <a:lstStyle/>
-          <a:p>
-            <a:pPr algn="ctr"/>
-            <a:r>
-              <a:rPr lang="en-US" dirty="0" err="1">
-                <a:solidFill>
-                  <a:schemeClr val="tx1"/>
-                </a:solidFill>
-              </a:rPr>
-              <a:t>Enclave</a:t>
-            </a:r>
-            <a:r>
-              <a:rPr lang="en-US" baseline="-25000" dirty="0" err="1">
-                <a:solidFill>
-                  <a:schemeClr val="tx1"/>
-                </a:solidFill>
-              </a:rPr>
-              <a:t>n</a:t>
-            </a:r>
-            <a:endParaRPr lang="en-US" baseline="-25000" dirty="0"/>
-          </a:p>
-        </p:txBody>
-      </p:sp>
-      <p:pic>
-        <p:nvPicPr>
-          <p:cNvPr id="368" name="Picture 367">
-            <a:extLst>
-              <a:ext uri="{FF2B5EF4-FFF2-40B4-BE49-F238E27FC236}">
-                <a16:creationId xmlns:a16="http://schemas.microsoft.com/office/drawing/2014/main" id="{04BE16B2-F406-BF4C-E21B-6D00394C96B9}"/>
-              </a:ext>
-            </a:extLst>
-          </p:cNvPr>
-          <p:cNvPicPr>
-            <a:picLocks noChangeAspect="1"/>
-          </p:cNvPicPr>
-          <p:nvPr/>
-        </p:nvPicPr>
-        <p:blipFill>
-          <a:blip r:embed="rId6"/>
-          <a:stretch>
-            <a:fillRect/>
-          </a:stretch>
-        </p:blipFill>
-        <p:spPr>
-          <a:xfrm>
-            <a:off x="7927412" y="3999114"/>
-            <a:ext cx="382189" cy="302710"/>
-          </a:xfrm>
-          <a:prstGeom prst="rect">
-            <a:avLst/>
-          </a:prstGeom>
-        </p:spPr>
-      </p:pic>
-      <p:sp>
-        <p:nvSpPr>
-          <p:cNvPr id="369" name="Rectangle 368">
-            <a:extLst>
-              <a:ext uri="{FF2B5EF4-FFF2-40B4-BE49-F238E27FC236}">
-                <a16:creationId xmlns:a16="http://schemas.microsoft.com/office/drawing/2014/main" id="{D76F7847-1AD5-0010-A062-DE96BFECD493}"/>
-              </a:ext>
-            </a:extLst>
-          </p:cNvPr>
-          <p:cNvSpPr/>
-          <p:nvPr/>
-        </p:nvSpPr>
-        <p:spPr>
-          <a:xfrm>
-            <a:off x="5623964" y="3655909"/>
-            <a:ext cx="2792747" cy="330394"/>
-          </a:xfrm>
-          <a:prstGeom prst="rect">
-            <a:avLst/>
-          </a:prstGeom>
-          <a:solidFill>
-            <a:schemeClr val="bg1">
-              <a:lumMod val="85000"/>
-            </a:schemeClr>
-          </a:solidFill>
-          <a:ln w="28575">
-            <a:solidFill>
-              <a:schemeClr val="tx1"/>
-            </a:solidFill>
-          </a:ln>
-        </p:spPr>
-        <p:style>
-          <a:lnRef idx="2">
-            <a:schemeClr val="accent1">
-              <a:shade val="15000"/>
-            </a:schemeClr>
-          </a:lnRef>
-          <a:fillRef idx="1">
-            <a:schemeClr val="accent1"/>
-          </a:fillRef>
-          <a:effectRef idx="0">
-            <a:schemeClr val="accent1"/>
-          </a:effectRef>
-          <a:fontRef idx="minor">
-            <a:schemeClr val="lt1"/>
-          </a:fontRef>
-        </p:style>
-        <p:txBody>
-          <a:bodyPr rtlCol="0" anchor="ctr"/>
-          <a:lstStyle/>
-          <a:p>
-            <a:pPr algn="ctr"/>
-            <a:r>
-              <a:rPr lang="en-US" b="1" dirty="0">
-                <a:solidFill>
-                  <a:schemeClr val="tx1"/>
-                </a:solidFill>
-                <a:latin typeface="Abadi MT Condensed Light" panose="020B0306030101010103" pitchFamily="34" charset="77"/>
-              </a:rPr>
-              <a:t>FCM, HW-ATT</a:t>
-            </a:r>
-            <a:endParaRPr lang="en-US" b="1" baseline="-25000" dirty="0">
-              <a:latin typeface="Abadi MT Condensed Light" panose="020B0306030101010103" pitchFamily="34" charset="77"/>
-            </a:endParaRPr>
-          </a:p>
-        </p:txBody>
-      </p:sp>
-      <p:sp>
-        <p:nvSpPr>
-          <p:cNvPr id="370" name="Rectangle 369">
-            <a:extLst>
-              <a:ext uri="{FF2B5EF4-FFF2-40B4-BE49-F238E27FC236}">
-                <a16:creationId xmlns:a16="http://schemas.microsoft.com/office/drawing/2014/main" id="{9BF2C618-2BB0-B48E-78CE-86C446E9A305}"/>
-              </a:ext>
-            </a:extLst>
-          </p:cNvPr>
-          <p:cNvSpPr/>
-          <p:nvPr/>
-        </p:nvSpPr>
-        <p:spPr>
-          <a:xfrm>
-            <a:off x="5619454" y="3986563"/>
-            <a:ext cx="1262113" cy="330394"/>
-          </a:xfrm>
-          <a:prstGeom prst="rect">
-            <a:avLst/>
-          </a:prstGeom>
-          <a:noFill/>
-          <a:ln w="28575">
-            <a:solidFill>
-              <a:schemeClr val="tx1"/>
-            </a:solidFill>
-            <a:prstDash val="solid"/>
-            <a:extLst>
-              <a:ext uri="{C807C97D-BFC1-408E-A445-0C87EB9F89A2}">
-                <ask:lineSketchStyleProps xmlns:ask="http://schemas.microsoft.com/office/drawing/2018/sketchyshapes">
-                  <ask:type>
-                    <ask:lineSketchNone/>
-                  </ask:type>
-                </ask:lineSketchStyleProps>
-              </a:ext>
-            </a:extLst>
-          </a:ln>
-        </p:spPr>
-        <p:style>
-          <a:lnRef idx="2">
-            <a:schemeClr val="accent1">
-              <a:shade val="15000"/>
-            </a:schemeClr>
-          </a:lnRef>
-          <a:fillRef idx="1">
-            <a:schemeClr val="accent1"/>
-          </a:fillRef>
-          <a:effectRef idx="0">
-            <a:schemeClr val="accent1"/>
-          </a:effectRef>
-          <a:fontRef idx="minor">
-            <a:schemeClr val="lt1"/>
-          </a:fontRef>
-        </p:style>
-        <p:txBody>
-          <a:bodyPr rtlCol="0" anchor="ctr"/>
-          <a:lstStyle/>
-          <a:p>
-            <a:pPr algn="ctr"/>
-            <a:endParaRPr lang="en-US" baseline="-25000" dirty="0"/>
-          </a:p>
-        </p:txBody>
-      </p:sp>
-      <p:pic>
-        <p:nvPicPr>
-          <p:cNvPr id="372" name="Picture 371">
-            <a:extLst>
-              <a:ext uri="{FF2B5EF4-FFF2-40B4-BE49-F238E27FC236}">
-                <a16:creationId xmlns:a16="http://schemas.microsoft.com/office/drawing/2014/main" id="{78E24BDC-65D0-4B8F-F70B-CCECF5C3E0B2}"/>
-              </a:ext>
-            </a:extLst>
-          </p:cNvPr>
-          <p:cNvPicPr>
-            <a:picLocks noChangeAspect="1"/>
-          </p:cNvPicPr>
-          <p:nvPr/>
-        </p:nvPicPr>
-        <p:blipFill>
-          <a:blip r:embed="rId7"/>
-          <a:stretch>
-            <a:fillRect/>
-          </a:stretch>
-        </p:blipFill>
-        <p:spPr>
-          <a:xfrm>
-            <a:off x="1029543" y="3999114"/>
-            <a:ext cx="294969" cy="310493"/>
-          </a:xfrm>
-          <a:prstGeom prst="rect">
-            <a:avLst/>
-          </a:prstGeom>
-        </p:spPr>
-      </p:pic>
-      <p:pic>
-        <p:nvPicPr>
-          <p:cNvPr id="373" name="Picture 372">
-            <a:extLst>
-              <a:ext uri="{FF2B5EF4-FFF2-40B4-BE49-F238E27FC236}">
-                <a16:creationId xmlns:a16="http://schemas.microsoft.com/office/drawing/2014/main" id="{70F24E84-F4B2-582D-3990-768F0DE08EDB}"/>
-              </a:ext>
-            </a:extLst>
-          </p:cNvPr>
-          <p:cNvPicPr>
-            <a:picLocks noChangeAspect="1"/>
-          </p:cNvPicPr>
-          <p:nvPr/>
-        </p:nvPicPr>
-        <p:blipFill>
-          <a:blip r:embed="rId7"/>
-          <a:stretch>
-            <a:fillRect/>
-          </a:stretch>
-        </p:blipFill>
-        <p:spPr>
-          <a:xfrm>
-            <a:off x="7281344" y="3999114"/>
-            <a:ext cx="294969" cy="310493"/>
-          </a:xfrm>
-          <a:prstGeom prst="rect">
-            <a:avLst/>
-          </a:prstGeom>
-        </p:spPr>
-      </p:pic>
-      <p:pic>
-        <p:nvPicPr>
-          <p:cNvPr id="375" name="Picture 374">
-            <a:extLst>
-              <a:ext uri="{FF2B5EF4-FFF2-40B4-BE49-F238E27FC236}">
-                <a16:creationId xmlns:a16="http://schemas.microsoft.com/office/drawing/2014/main" id="{628BE4D7-290E-9370-B6FE-6865EC9DE796}"/>
-              </a:ext>
-            </a:extLst>
-          </p:cNvPr>
-          <p:cNvPicPr>
-            <a:picLocks noChangeAspect="1"/>
-          </p:cNvPicPr>
-          <p:nvPr/>
-        </p:nvPicPr>
-        <p:blipFill>
-          <a:blip r:embed="rId6"/>
-          <a:stretch>
-            <a:fillRect/>
-          </a:stretch>
-        </p:blipFill>
-        <p:spPr>
-          <a:xfrm>
-            <a:off x="2450683" y="3999114"/>
-            <a:ext cx="382189" cy="302710"/>
-          </a:xfrm>
-          <a:prstGeom prst="rect">
-            <a:avLst/>
-          </a:prstGeom>
-        </p:spPr>
-      </p:pic>
-      <p:sp>
-        <p:nvSpPr>
-          <p:cNvPr id="377" name="TextBox 376">
-            <a:extLst>
-              <a:ext uri="{FF2B5EF4-FFF2-40B4-BE49-F238E27FC236}">
-                <a16:creationId xmlns:a16="http://schemas.microsoft.com/office/drawing/2014/main" id="{39D224A1-D83C-C914-48DB-4A999E6D56F4}"/>
-              </a:ext>
-            </a:extLst>
-          </p:cNvPr>
-          <p:cNvSpPr txBox="1"/>
-          <p:nvPr/>
-        </p:nvSpPr>
-        <p:spPr>
-          <a:xfrm>
-            <a:off x="1088514" y="4265143"/>
-            <a:ext cx="1497076" cy="369332"/>
-          </a:xfrm>
-          <a:prstGeom prst="rect">
-            <a:avLst/>
-          </a:prstGeom>
-          <a:noFill/>
-        </p:spPr>
-        <p:txBody>
-          <a:bodyPr wrap="none" rtlCol="0">
-            <a:spAutoFit/>
-          </a:bodyPr>
-          <a:lstStyle/>
-          <a:p>
-            <a:r>
-              <a:rPr lang="en-US" dirty="0">
-                <a:solidFill>
-                  <a:schemeClr val="tx1">
-                    <a:lumMod val="65000"/>
-                    <a:lumOff val="35000"/>
-                  </a:schemeClr>
-                </a:solidFill>
-              </a:rPr>
-              <a:t>General TEEs</a:t>
-            </a:r>
-          </a:p>
-        </p:txBody>
-      </p:sp>
-      <p:sp>
-        <p:nvSpPr>
-          <p:cNvPr id="378" name="TextBox 377">
-            <a:extLst>
-              <a:ext uri="{FF2B5EF4-FFF2-40B4-BE49-F238E27FC236}">
-                <a16:creationId xmlns:a16="http://schemas.microsoft.com/office/drawing/2014/main" id="{4245879D-FF1B-C903-CF26-6AFF3B3A3171}"/>
-              </a:ext>
-            </a:extLst>
-          </p:cNvPr>
-          <p:cNvSpPr txBox="1"/>
-          <p:nvPr/>
-        </p:nvSpPr>
-        <p:spPr>
-          <a:xfrm>
-            <a:off x="5242859" y="4265143"/>
-            <a:ext cx="2018309" cy="369332"/>
-          </a:xfrm>
-          <a:prstGeom prst="rect">
-            <a:avLst/>
-          </a:prstGeom>
-          <a:noFill/>
-        </p:spPr>
-        <p:txBody>
-          <a:bodyPr wrap="none" rtlCol="0">
-            <a:spAutoFit/>
-          </a:bodyPr>
-          <a:lstStyle/>
-          <a:p>
-            <a:r>
-              <a:rPr lang="en-US" b="1" dirty="0">
-                <a:latin typeface="Abadi MT Condensed Light" panose="020B0306030101010103" pitchFamily="34" charset="77"/>
-              </a:rPr>
-              <a:t>BYOT</a:t>
-            </a:r>
-            <a:r>
-              <a:rPr lang="en-US" sz="1600" b="1" dirty="0">
-                <a:latin typeface="Abadi MT Condensed Light" panose="020B0306030101010103" pitchFamily="34" charset="77"/>
-              </a:rPr>
-              <a:t>EE</a:t>
-            </a:r>
-            <a:r>
-              <a:rPr lang="en-US" b="1" dirty="0"/>
-              <a:t> Framework</a:t>
-            </a:r>
-          </a:p>
-        </p:txBody>
-      </p:sp>
-      <p:sp>
-        <p:nvSpPr>
-          <p:cNvPr id="379" name="Rectangle 378">
-            <a:extLst>
-              <a:ext uri="{FF2B5EF4-FFF2-40B4-BE49-F238E27FC236}">
-                <a16:creationId xmlns:a16="http://schemas.microsoft.com/office/drawing/2014/main" id="{CFD73C85-32AE-808E-B462-81C264C84DD0}"/>
-              </a:ext>
-            </a:extLst>
-          </p:cNvPr>
-          <p:cNvSpPr/>
-          <p:nvPr/>
-        </p:nvSpPr>
-        <p:spPr>
-          <a:xfrm>
-            <a:off x="24898" y="247986"/>
-            <a:ext cx="3635566" cy="1576650"/>
-          </a:xfrm>
-          <a:prstGeom prst="rect">
-            <a:avLst/>
-          </a:prstGeom>
-          <a:noFill/>
-          <a:ln w="19050">
-            <a:prstDash val="lgDash"/>
-          </a:ln>
-        </p:spPr>
-        <p:style>
-          <a:lnRef idx="2">
-            <a:schemeClr val="accent1">
-              <a:shade val="15000"/>
-            </a:schemeClr>
-          </a:lnRef>
-          <a:fillRef idx="1">
-            <a:schemeClr val="accent1"/>
-          </a:fillRef>
-          <a:effectRef idx="0">
-            <a:schemeClr val="accent1"/>
-          </a:effectRef>
-          <a:fontRef idx="minor">
-            <a:schemeClr val="lt1"/>
-          </a:fontRef>
-        </p:style>
-        <p:txBody>
-          <a:bodyPr rtlCol="0" anchor="ctr"/>
-          <a:lstStyle/>
-          <a:p>
-            <a:pPr algn="ctr"/>
-            <a:endParaRPr lang="en-US"/>
-          </a:p>
-        </p:txBody>
-      </p:sp>
-      <p:sp>
-        <p:nvSpPr>
-          <p:cNvPr id="380" name="TextBox 379">
-            <a:extLst>
-              <a:ext uri="{FF2B5EF4-FFF2-40B4-BE49-F238E27FC236}">
-                <a16:creationId xmlns:a16="http://schemas.microsoft.com/office/drawing/2014/main" id="{7AEF56F1-28EA-B48A-1D3D-EFC9FE9DF61B}"/>
-              </a:ext>
-            </a:extLst>
-          </p:cNvPr>
-          <p:cNvSpPr txBox="1"/>
-          <p:nvPr/>
-        </p:nvSpPr>
-        <p:spPr>
-          <a:xfrm>
-            <a:off x="61318" y="574291"/>
-            <a:ext cx="3579725" cy="1292662"/>
-          </a:xfrm>
-          <a:prstGeom prst="rect">
-            <a:avLst/>
-          </a:prstGeom>
-          <a:noFill/>
-        </p:spPr>
-        <p:txBody>
-          <a:bodyPr wrap="square">
-            <a:spAutoFit/>
-          </a:bodyPr>
-          <a:lstStyle/>
-          <a:p>
-            <a:r>
-              <a:rPr lang="en-US" sz="1800" dirty="0"/>
-              <a:t>1</a:t>
-            </a:r>
-            <a:r>
-              <a:rPr lang="en-US" sz="1800" dirty="0">
-                <a:latin typeface="Abadi MT Condensed Light" panose="020B0306030101010103" pitchFamily="34" charset="77"/>
-              </a:rPr>
-              <a:t>. </a:t>
-            </a:r>
-            <a:r>
-              <a:rPr lang="en-US" sz="1800" b="1" dirty="0">
-                <a:latin typeface="Abadi MT Condensed Light" panose="020B0306030101010103" pitchFamily="34" charset="77"/>
-              </a:rPr>
-              <a:t>FCM</a:t>
-            </a:r>
-            <a:r>
-              <a:rPr lang="en-US" sz="1800" dirty="0">
-                <a:latin typeface="Abadi MT Condensed Light" panose="020B0306030101010103" pitchFamily="34" charset="77"/>
-              </a:rPr>
-              <a:t>: </a:t>
-            </a:r>
-            <a:r>
-              <a:rPr lang="en-US" sz="1400" dirty="0"/>
-              <a:t>Configures and measures the TEE 	FPGA hardware- </a:t>
-            </a:r>
-            <a:r>
-              <a:rPr lang="en-US" sz="1400" b="1" i="1" dirty="0"/>
-              <a:t>A</a:t>
-            </a:r>
-            <a:r>
-              <a:rPr lang="en-US" sz="1400" b="1" i="1" baseline="-25000" dirty="0"/>
-              <a:t>H</a:t>
-            </a:r>
-          </a:p>
-          <a:p>
-            <a:r>
-              <a:rPr lang="en-US" sz="1800" dirty="0">
-                <a:solidFill>
-                  <a:schemeClr val="tx1"/>
-                </a:solidFill>
-              </a:rPr>
-              <a:t>2. </a:t>
-            </a:r>
-            <a:r>
-              <a:rPr lang="en-US" sz="1800" b="1" dirty="0">
-                <a:solidFill>
-                  <a:schemeClr val="tx1"/>
-                </a:solidFill>
-                <a:latin typeface="Abadi MT Condensed Light" panose="020B0306030101010103" pitchFamily="34" charset="77"/>
-              </a:rPr>
-              <a:t>HW-ATT: </a:t>
-            </a:r>
-            <a:r>
-              <a:rPr lang="en-US" sz="1400" dirty="0">
-                <a:solidFill>
-                  <a:schemeClr val="tx1"/>
-                </a:solidFill>
-              </a:rPr>
-              <a:t>Measures TEE software   	components - </a:t>
-            </a:r>
-            <a:r>
-              <a:rPr lang="en-US" sz="1400" b="1" i="1" dirty="0">
-                <a:solidFill>
-                  <a:schemeClr val="tx1"/>
-                </a:solidFill>
-              </a:rPr>
-              <a:t>A</a:t>
-            </a:r>
-            <a:r>
-              <a:rPr lang="en-US" sz="1400" b="1" i="1" baseline="-25000" dirty="0">
-                <a:solidFill>
-                  <a:schemeClr val="tx1"/>
-                </a:solidFill>
-              </a:rPr>
-              <a:t>S</a:t>
-            </a:r>
-            <a:r>
-              <a:rPr lang="en-US" sz="1400" b="1" i="1" dirty="0">
-                <a:solidFill>
-                  <a:schemeClr val="tx1"/>
-                </a:solidFill>
-              </a:rPr>
-              <a:t> </a:t>
-            </a:r>
-            <a:r>
-              <a:rPr lang="en-US" sz="1400" dirty="0"/>
-              <a:t>and combines with</a:t>
-            </a:r>
-          </a:p>
-          <a:p>
-            <a:r>
-              <a:rPr lang="en-US" sz="1400" b="1" i="1" dirty="0"/>
-              <a:t>	A</a:t>
-            </a:r>
-            <a:r>
-              <a:rPr lang="en-US" sz="1400" b="1" i="1" baseline="-25000" dirty="0"/>
-              <a:t>H</a:t>
-            </a:r>
-            <a:r>
-              <a:rPr lang="en-US" sz="1400" i="1" dirty="0"/>
-              <a:t>  for verification - </a:t>
-            </a:r>
-            <a:r>
-              <a:rPr lang="en-US" sz="1400" b="1" i="1" dirty="0"/>
-              <a:t>A</a:t>
-            </a:r>
-            <a:r>
-              <a:rPr lang="en-US" sz="1400" b="1" i="1" baseline="-25000" dirty="0"/>
-              <a:t>TEE</a:t>
-            </a:r>
-          </a:p>
-        </p:txBody>
-      </p:sp>
-      <p:sp>
-        <p:nvSpPr>
-          <p:cNvPr id="381" name="TextBox 380">
-            <a:extLst>
-              <a:ext uri="{FF2B5EF4-FFF2-40B4-BE49-F238E27FC236}">
-                <a16:creationId xmlns:a16="http://schemas.microsoft.com/office/drawing/2014/main" id="{945CC5B7-D6F3-8E4F-3F80-B5A6BF0AE087}"/>
-              </a:ext>
-            </a:extLst>
-          </p:cNvPr>
-          <p:cNvSpPr txBox="1"/>
-          <p:nvPr/>
-        </p:nvSpPr>
-        <p:spPr>
-          <a:xfrm>
-            <a:off x="567212" y="250903"/>
-            <a:ext cx="2706831" cy="369332"/>
-          </a:xfrm>
-          <a:prstGeom prst="rect">
-            <a:avLst/>
-          </a:prstGeom>
-          <a:noFill/>
-        </p:spPr>
-        <p:txBody>
-          <a:bodyPr wrap="none" rtlCol="0">
-            <a:spAutoFit/>
-          </a:bodyPr>
-          <a:lstStyle/>
-          <a:p>
-            <a:r>
-              <a:rPr lang="en-US" b="1" i="1" dirty="0"/>
-              <a:t>TEE Trust Establishment</a:t>
-            </a:r>
-          </a:p>
-        </p:txBody>
-      </p:sp>
-      <p:sp>
-        <p:nvSpPr>
-          <p:cNvPr id="383" name="Rectangle 382">
-            <a:extLst>
-              <a:ext uri="{FF2B5EF4-FFF2-40B4-BE49-F238E27FC236}">
-                <a16:creationId xmlns:a16="http://schemas.microsoft.com/office/drawing/2014/main" id="{4D0AB89E-9134-E455-8346-5899B6211C55}"/>
-              </a:ext>
-            </a:extLst>
-          </p:cNvPr>
-          <p:cNvSpPr/>
-          <p:nvPr/>
-        </p:nvSpPr>
-        <p:spPr>
-          <a:xfrm>
-            <a:off x="26999" y="3569951"/>
-            <a:ext cx="3635566" cy="421232"/>
-          </a:xfrm>
-          <a:prstGeom prst="rect">
-            <a:avLst/>
-          </a:prstGeom>
-          <a:solidFill>
-            <a:schemeClr val="bg1"/>
-          </a:solidFill>
-          <a:ln w="28575">
-            <a:solidFill>
-              <a:schemeClr val="tx1">
-                <a:lumMod val="65000"/>
-                <a:lumOff val="35000"/>
-              </a:schemeClr>
-            </a:solidFill>
-          </a:ln>
-        </p:spPr>
-        <p:style>
-          <a:lnRef idx="2">
-            <a:schemeClr val="accent1">
-              <a:shade val="15000"/>
-            </a:schemeClr>
-          </a:lnRef>
-          <a:fillRef idx="1">
-            <a:schemeClr val="accent1"/>
-          </a:fillRef>
-          <a:effectRef idx="0">
-            <a:schemeClr val="accent1"/>
-          </a:effectRef>
-          <a:fontRef idx="minor">
-            <a:schemeClr val="lt1"/>
-          </a:fontRef>
-        </p:style>
-        <p:txBody>
-          <a:bodyPr rtlCol="0" anchor="ctr"/>
-          <a:lstStyle/>
-          <a:p>
-            <a:pPr algn="ctr"/>
             <a:r>
               <a:rPr lang="en-US" sz="1500" dirty="0">
                 <a:solidFill>
@@ -5547,7 +4276,7 @@
                   </a:schemeClr>
                 </a:solidFill>
               </a:rPr>
-              <a:t>Shared CPU, Memory, Cache, Peripherals</a:t>
+              <a:t>Shared CPU, Memory, Cache</a:t>
             </a:r>
           </a:p>
         </p:txBody>
@@ -5572,7 +4301,12 @@
           <a:prstGeom prst="rect">
             <a:avLst/>
           </a:prstGeom>
-          <a:noFill/>
+          <a:solidFill>
+            <a:schemeClr val="accent2">
+              <a:lumMod val="20000"/>
+              <a:lumOff val="80000"/>
+            </a:schemeClr>
+          </a:solidFill>
           <a:ln w="28575">
             <a:solidFill>
               <a:schemeClr val="tx1">
@@ -5637,7 +4371,12 @@
           <a:prstGeom prst="rect">
             <a:avLst/>
           </a:prstGeom>
-          <a:noFill/>
+          <a:solidFill>
+            <a:schemeClr val="accent6">
+              <a:lumMod val="20000"/>
+              <a:lumOff val="80000"/>
+            </a:schemeClr>
+          </a:solidFill>
           <a:ln w="28575">
             <a:solidFill>
               <a:schemeClr val="tx1"/>
@@ -5699,7 +4438,12 @@
           <a:prstGeom prst="rect">
             <a:avLst/>
           </a:prstGeom>
-          <a:noFill/>
+          <a:solidFill>
+            <a:schemeClr val="accent2">
+              <a:lumMod val="20000"/>
+              <a:lumOff val="80000"/>
+            </a:schemeClr>
+          </a:solidFill>
           <a:ln w="28575">
             <a:solidFill>
               <a:schemeClr val="tx1"/>
@@ -5727,10 +4471,7 @@
           <a:lstStyle/>
           <a:p>
             <a:pPr algn="ctr"/>
-            <a:r>
-              <a:rPr lang="en-US" dirty="0"/>
-              <a:t>x</a:t>
-            </a:r>
+            <a:endParaRPr lang="en-US" dirty="0"/>
           </a:p>
         </p:txBody>
       </p:sp>
@@ -5754,7 +4495,12 @@
           <a:prstGeom prst="rect">
             <a:avLst/>
           </a:prstGeom>
-          <a:noFill/>
+          <a:solidFill>
+            <a:schemeClr val="accent2">
+              <a:lumMod val="20000"/>
+              <a:lumOff val="80000"/>
+            </a:schemeClr>
+          </a:solidFill>
           <a:ln w="28575">
             <a:solidFill>
               <a:schemeClr val="tx1"/>
@@ -5793,6 +4539,1454 @@
           <a:p>
             <a:pPr algn="ctr"/>
             <a:endParaRPr lang="en-US" baseline="-25000" dirty="0"/>
+          </a:p>
+        </p:txBody>
+      </p:sp>
+      <p:sp>
+        <p:nvSpPr>
+          <p:cNvPr id="2" name="Rectangle 1">
+            <a:extLst>
+              <a:ext uri="{FF2B5EF4-FFF2-40B4-BE49-F238E27FC236}">
+                <a16:creationId xmlns:a16="http://schemas.microsoft.com/office/drawing/2014/main" id="{E5176D9E-EF23-0A20-A609-D04988F5A642}"/>
+              </a:ext>
+            </a:extLst>
+          </p:cNvPr>
+          <p:cNvSpPr/>
+          <p:nvPr/>
+        </p:nvSpPr>
+        <p:spPr>
+          <a:xfrm>
+            <a:off x="5619454" y="247986"/>
+            <a:ext cx="2792697" cy="3737524"/>
+          </a:xfrm>
+          <a:prstGeom prst="rect">
+            <a:avLst/>
+          </a:prstGeom>
+          <a:solidFill>
+            <a:schemeClr val="accent6">
+              <a:lumMod val="20000"/>
+              <a:lumOff val="80000"/>
+            </a:schemeClr>
+          </a:solidFill>
+          <a:ln>
+            <a:noFill/>
+          </a:ln>
+        </p:spPr>
+        <p:style>
+          <a:lnRef idx="2">
+            <a:schemeClr val="accent1">
+              <a:shade val="15000"/>
+            </a:schemeClr>
+          </a:lnRef>
+          <a:fillRef idx="1">
+            <a:schemeClr val="accent1"/>
+          </a:fillRef>
+          <a:effectRef idx="0">
+            <a:schemeClr val="accent1"/>
+          </a:effectRef>
+          <a:fontRef idx="minor">
+            <a:schemeClr val="lt1"/>
+          </a:fontRef>
+        </p:style>
+        <p:txBody>
+          <a:bodyPr rtlCol="0" anchor="ctr"/>
+          <a:lstStyle/>
+          <a:p>
+            <a:pPr algn="ctr"/>
+            <a:endParaRPr lang="en-US"/>
+          </a:p>
+        </p:txBody>
+      </p:sp>
+      <p:sp>
+        <p:nvSpPr>
+          <p:cNvPr id="3" name="Rectangle 2">
+            <a:extLst>
+              <a:ext uri="{FF2B5EF4-FFF2-40B4-BE49-F238E27FC236}">
+                <a16:creationId xmlns:a16="http://schemas.microsoft.com/office/drawing/2014/main" id="{32317FF3-A6B1-E88B-62D9-DEBB44E1383A}"/>
+              </a:ext>
+            </a:extLst>
+          </p:cNvPr>
+          <p:cNvSpPr/>
+          <p:nvPr/>
+        </p:nvSpPr>
+        <p:spPr>
+          <a:xfrm rot="16200000">
+            <a:off x="4552695" y="1737869"/>
+            <a:ext cx="3400389" cy="420624"/>
+          </a:xfrm>
+          <a:prstGeom prst="rect">
+            <a:avLst/>
+          </a:prstGeom>
+          <a:noFill/>
+          <a:ln w="28575">
+            <a:solidFill>
+              <a:schemeClr val="tx1"/>
+            </a:solidFill>
+          </a:ln>
+        </p:spPr>
+        <p:style>
+          <a:lnRef idx="2">
+            <a:schemeClr val="accent1">
+              <a:shade val="15000"/>
+            </a:schemeClr>
+          </a:lnRef>
+          <a:fillRef idx="1">
+            <a:schemeClr val="accent1"/>
+          </a:fillRef>
+          <a:effectRef idx="0">
+            <a:schemeClr val="accent1"/>
+          </a:effectRef>
+          <a:fontRef idx="minor">
+            <a:schemeClr val="lt1"/>
+          </a:fontRef>
+        </p:style>
+        <p:txBody>
+          <a:bodyPr rtlCol="0" anchor="ctr"/>
+          <a:lstStyle/>
+          <a:p>
+            <a:pPr algn="ctr"/>
+            <a:r>
+              <a:rPr lang="en-US" dirty="0">
+                <a:solidFill>
+                  <a:schemeClr val="tx1"/>
+                </a:solidFill>
+              </a:rPr>
+              <a:t>     Isolated CPU, Memory, Cache</a:t>
+            </a:r>
+            <a:endParaRPr lang="en-US" dirty="0"/>
+          </a:p>
+        </p:txBody>
+      </p:sp>
+      <p:sp>
+        <p:nvSpPr>
+          <p:cNvPr id="4" name="Rectangle 3">
+            <a:extLst>
+              <a:ext uri="{FF2B5EF4-FFF2-40B4-BE49-F238E27FC236}">
+                <a16:creationId xmlns:a16="http://schemas.microsoft.com/office/drawing/2014/main" id="{7A74CE6A-E799-C024-207B-C9F26AF268D7}"/>
+              </a:ext>
+            </a:extLst>
+          </p:cNvPr>
+          <p:cNvSpPr/>
+          <p:nvPr/>
+        </p:nvSpPr>
+        <p:spPr>
+          <a:xfrm rot="16200000">
+            <a:off x="4972975" y="1738821"/>
+            <a:ext cx="3402901" cy="421232"/>
+          </a:xfrm>
+          <a:prstGeom prst="rect">
+            <a:avLst/>
+          </a:prstGeom>
+          <a:noFill/>
+          <a:ln w="28575">
+            <a:solidFill>
+              <a:schemeClr val="tx1"/>
+            </a:solidFill>
+          </a:ln>
+        </p:spPr>
+        <p:style>
+          <a:lnRef idx="2">
+            <a:schemeClr val="accent1">
+              <a:shade val="15000"/>
+            </a:schemeClr>
+          </a:lnRef>
+          <a:fillRef idx="1">
+            <a:schemeClr val="accent1"/>
+          </a:fillRef>
+          <a:effectRef idx="0">
+            <a:schemeClr val="accent1"/>
+          </a:effectRef>
+          <a:fontRef idx="minor">
+            <a:schemeClr val="lt1"/>
+          </a:fontRef>
+        </p:style>
+        <p:txBody>
+          <a:bodyPr rtlCol="0" anchor="ctr"/>
+          <a:lstStyle/>
+          <a:p>
+            <a:pPr algn="ctr"/>
+            <a:r>
+              <a:rPr lang="en-US" dirty="0">
+                <a:solidFill>
+                  <a:schemeClr val="tx1"/>
+                </a:solidFill>
+                <a:latin typeface="Abadi MT Condensed Light" panose="020B0306030101010103" pitchFamily="34" charset="77"/>
+              </a:rPr>
+              <a:t>FIRMWARE</a:t>
+            </a:r>
+            <a:endParaRPr lang="en-US" dirty="0"/>
+          </a:p>
+        </p:txBody>
+      </p:sp>
+      <p:sp>
+        <p:nvSpPr>
+          <p:cNvPr id="5" name="TextBox 4">
+            <a:extLst>
+              <a:ext uri="{FF2B5EF4-FFF2-40B4-BE49-F238E27FC236}">
+                <a16:creationId xmlns:a16="http://schemas.microsoft.com/office/drawing/2014/main" id="{D1B992FE-D1EC-CCCB-D68A-AAD7A3D7F18E}"/>
+              </a:ext>
+            </a:extLst>
+          </p:cNvPr>
+          <p:cNvSpPr txBox="1"/>
+          <p:nvPr/>
+        </p:nvSpPr>
+        <p:spPr>
+          <a:xfrm rot="16200000">
+            <a:off x="6746659" y="1741973"/>
+            <a:ext cx="381836" cy="477054"/>
+          </a:xfrm>
+          <a:prstGeom prst="rect">
+            <a:avLst/>
+          </a:prstGeom>
+          <a:noFill/>
+        </p:spPr>
+        <p:txBody>
+          <a:bodyPr wrap="square" rtlCol="0">
+            <a:spAutoFit/>
+          </a:bodyPr>
+          <a:lstStyle/>
+          <a:p>
+            <a:r>
+              <a:rPr lang="en-US" sz="2500" dirty="0"/>
+              <a:t>…</a:t>
+            </a:r>
+          </a:p>
+        </p:txBody>
+      </p:sp>
+      <p:sp>
+        <p:nvSpPr>
+          <p:cNvPr id="6" name="Rectangle 5">
+            <a:extLst>
+              <a:ext uri="{FF2B5EF4-FFF2-40B4-BE49-F238E27FC236}">
+                <a16:creationId xmlns:a16="http://schemas.microsoft.com/office/drawing/2014/main" id="{2CC40F7A-390E-8A67-2696-2D156ED5B1CB}"/>
+              </a:ext>
+            </a:extLst>
+          </p:cNvPr>
+          <p:cNvSpPr/>
+          <p:nvPr/>
+        </p:nvSpPr>
+        <p:spPr>
+          <a:xfrm>
+            <a:off x="7150636" y="247986"/>
+            <a:ext cx="420624" cy="3402903"/>
+          </a:xfrm>
+          <a:prstGeom prst="rect">
+            <a:avLst/>
+          </a:prstGeom>
+          <a:noFill/>
+          <a:ln w="28575">
+            <a:solidFill>
+              <a:schemeClr val="tx1"/>
+            </a:solidFill>
+          </a:ln>
+        </p:spPr>
+        <p:style>
+          <a:lnRef idx="2">
+            <a:schemeClr val="accent1">
+              <a:shade val="15000"/>
+            </a:schemeClr>
+          </a:lnRef>
+          <a:fillRef idx="1">
+            <a:schemeClr val="accent1"/>
+          </a:fillRef>
+          <a:effectRef idx="0">
+            <a:schemeClr val="accent1"/>
+          </a:effectRef>
+          <a:fontRef idx="minor">
+            <a:schemeClr val="lt1"/>
+          </a:fontRef>
+        </p:style>
+        <p:txBody>
+          <a:bodyPr rtlCol="0" anchor="ctr"/>
+          <a:lstStyle/>
+          <a:p>
+            <a:pPr algn="ctr"/>
+            <a:endParaRPr lang="en-US"/>
+          </a:p>
+        </p:txBody>
+      </p:sp>
+      <p:sp>
+        <p:nvSpPr>
+          <p:cNvPr id="7" name="Rectangle 6">
+            <a:extLst>
+              <a:ext uri="{FF2B5EF4-FFF2-40B4-BE49-F238E27FC236}">
+                <a16:creationId xmlns:a16="http://schemas.microsoft.com/office/drawing/2014/main" id="{20687F62-A221-8FF1-15C7-CFFFBC57343C}"/>
+              </a:ext>
+            </a:extLst>
+          </p:cNvPr>
+          <p:cNvSpPr/>
+          <p:nvPr/>
+        </p:nvSpPr>
+        <p:spPr>
+          <a:xfrm rot="16200000">
+            <a:off x="6083412" y="1738822"/>
+            <a:ext cx="3402904" cy="421232"/>
+          </a:xfrm>
+          <a:prstGeom prst="rect">
+            <a:avLst/>
+          </a:prstGeom>
+          <a:solidFill>
+            <a:schemeClr val="accent6">
+              <a:lumMod val="20000"/>
+              <a:lumOff val="80000"/>
+            </a:schemeClr>
+          </a:solidFill>
+          <a:ln w="28575">
+            <a:solidFill>
+              <a:schemeClr val="tx1"/>
+            </a:solidFill>
+          </a:ln>
+        </p:spPr>
+        <p:style>
+          <a:lnRef idx="2">
+            <a:schemeClr val="accent1">
+              <a:shade val="15000"/>
+            </a:schemeClr>
+          </a:lnRef>
+          <a:fillRef idx="1">
+            <a:schemeClr val="accent1"/>
+          </a:fillRef>
+          <a:effectRef idx="0">
+            <a:schemeClr val="accent1"/>
+          </a:effectRef>
+          <a:fontRef idx="minor">
+            <a:schemeClr val="lt1"/>
+          </a:fontRef>
+        </p:style>
+        <p:txBody>
+          <a:bodyPr rtlCol="0" anchor="ctr"/>
+          <a:lstStyle/>
+          <a:p>
+            <a:pPr algn="ctr"/>
+            <a:r>
+              <a:rPr lang="en-US" dirty="0">
+                <a:solidFill>
+                  <a:schemeClr val="tx1"/>
+                </a:solidFill>
+              </a:rPr>
+              <a:t>     Isolated CPU, Memory, Cache</a:t>
+            </a:r>
+            <a:endParaRPr lang="en-US" dirty="0"/>
+          </a:p>
+        </p:txBody>
+      </p:sp>
+      <p:sp>
+        <p:nvSpPr>
+          <p:cNvPr id="8" name="Rectangle 7">
+            <a:extLst>
+              <a:ext uri="{FF2B5EF4-FFF2-40B4-BE49-F238E27FC236}">
+                <a16:creationId xmlns:a16="http://schemas.microsoft.com/office/drawing/2014/main" id="{6AD08117-812D-7A52-956A-4DA372B01071}"/>
+              </a:ext>
+            </a:extLst>
+          </p:cNvPr>
+          <p:cNvSpPr/>
+          <p:nvPr/>
+        </p:nvSpPr>
+        <p:spPr>
+          <a:xfrm rot="16200000">
+            <a:off x="6504644" y="1738822"/>
+            <a:ext cx="3402904" cy="421232"/>
+          </a:xfrm>
+          <a:prstGeom prst="rect">
+            <a:avLst/>
+          </a:prstGeom>
+          <a:solidFill>
+            <a:schemeClr val="accent6">
+              <a:lumMod val="20000"/>
+              <a:lumOff val="80000"/>
+            </a:schemeClr>
+          </a:solidFill>
+          <a:ln w="28575">
+            <a:solidFill>
+              <a:schemeClr val="tx1"/>
+            </a:solidFill>
+          </a:ln>
+        </p:spPr>
+        <p:style>
+          <a:lnRef idx="2">
+            <a:schemeClr val="accent1">
+              <a:shade val="15000"/>
+            </a:schemeClr>
+          </a:lnRef>
+          <a:fillRef idx="1">
+            <a:schemeClr val="accent1"/>
+          </a:fillRef>
+          <a:effectRef idx="0">
+            <a:schemeClr val="accent1"/>
+          </a:effectRef>
+          <a:fontRef idx="minor">
+            <a:schemeClr val="lt1"/>
+          </a:fontRef>
+        </p:style>
+        <p:txBody>
+          <a:bodyPr rtlCol="0" anchor="ctr"/>
+          <a:lstStyle/>
+          <a:p>
+            <a:pPr algn="ctr"/>
+            <a:r>
+              <a:rPr lang="en-US" dirty="0">
+                <a:solidFill>
+                  <a:schemeClr val="tx1"/>
+                </a:solidFill>
+                <a:latin typeface="Abadi MT Condensed Light" panose="020B0306030101010103" pitchFamily="34" charset="77"/>
+              </a:rPr>
+              <a:t>FIRMWARE</a:t>
+            </a:r>
+            <a:endParaRPr lang="en-US" dirty="0">
+              <a:latin typeface="Abadi MT Condensed Light" panose="020B0306030101010103" pitchFamily="34" charset="77"/>
+            </a:endParaRPr>
+          </a:p>
+        </p:txBody>
+      </p:sp>
+      <p:sp>
+        <p:nvSpPr>
+          <p:cNvPr id="9" name="Rectangle 8">
+            <a:extLst>
+              <a:ext uri="{FF2B5EF4-FFF2-40B4-BE49-F238E27FC236}">
+                <a16:creationId xmlns:a16="http://schemas.microsoft.com/office/drawing/2014/main" id="{A0EC2FB1-C7DF-B4E4-0AF7-6C126B2816B1}"/>
+              </a:ext>
+            </a:extLst>
+          </p:cNvPr>
+          <p:cNvSpPr/>
+          <p:nvPr/>
+        </p:nvSpPr>
+        <p:spPr>
+          <a:xfrm>
+            <a:off x="5619455" y="247986"/>
+            <a:ext cx="420624" cy="3402900"/>
+          </a:xfrm>
+          <a:prstGeom prst="rect">
+            <a:avLst/>
+          </a:prstGeom>
+          <a:noFill/>
+          <a:ln w="28575">
+            <a:solidFill>
+              <a:schemeClr val="tx1"/>
+            </a:solidFill>
+          </a:ln>
+        </p:spPr>
+        <p:style>
+          <a:lnRef idx="2">
+            <a:schemeClr val="accent1">
+              <a:shade val="15000"/>
+            </a:schemeClr>
+          </a:lnRef>
+          <a:fillRef idx="1">
+            <a:schemeClr val="accent1"/>
+          </a:fillRef>
+          <a:effectRef idx="0">
+            <a:schemeClr val="accent1"/>
+          </a:effectRef>
+          <a:fontRef idx="minor">
+            <a:schemeClr val="lt1"/>
+          </a:fontRef>
+        </p:style>
+        <p:txBody>
+          <a:bodyPr rtlCol="0" anchor="ctr"/>
+          <a:lstStyle/>
+          <a:p>
+            <a:pPr algn="ctr"/>
+            <a:endParaRPr lang="en-US"/>
+          </a:p>
+        </p:txBody>
+      </p:sp>
+      <p:sp>
+        <p:nvSpPr>
+          <p:cNvPr id="10" name="Rectangle 9">
+            <a:extLst>
+              <a:ext uri="{FF2B5EF4-FFF2-40B4-BE49-F238E27FC236}">
+                <a16:creationId xmlns:a16="http://schemas.microsoft.com/office/drawing/2014/main" id="{054AA035-8D8A-1393-55DF-2DA1577D68B1}"/>
+              </a:ext>
+            </a:extLst>
+          </p:cNvPr>
+          <p:cNvSpPr/>
+          <p:nvPr/>
+        </p:nvSpPr>
+        <p:spPr>
+          <a:xfrm>
+            <a:off x="6885043" y="247986"/>
+            <a:ext cx="265594" cy="4066460"/>
+          </a:xfrm>
+          <a:prstGeom prst="rect">
+            <a:avLst/>
+          </a:prstGeom>
+          <a:solidFill>
+            <a:schemeClr val="accent6">
+              <a:lumMod val="20000"/>
+              <a:lumOff val="80000"/>
+            </a:schemeClr>
+          </a:solidFill>
+          <a:ln w="28575">
+            <a:solidFill>
+              <a:schemeClr val="tx1"/>
+            </a:solidFill>
+          </a:ln>
+        </p:spPr>
+        <p:style>
+          <a:lnRef idx="2">
+            <a:schemeClr val="accent1">
+              <a:shade val="15000"/>
+            </a:schemeClr>
+          </a:lnRef>
+          <a:fillRef idx="1">
+            <a:schemeClr val="accent1"/>
+          </a:fillRef>
+          <a:effectRef idx="0">
+            <a:schemeClr val="accent1"/>
+          </a:effectRef>
+          <a:fontRef idx="minor">
+            <a:schemeClr val="lt1"/>
+          </a:fontRef>
+        </p:style>
+        <p:txBody>
+          <a:bodyPr rtlCol="0" anchor="ctr"/>
+          <a:lstStyle/>
+          <a:p>
+            <a:pPr algn="ctr"/>
+            <a:endParaRPr lang="en-US"/>
+          </a:p>
+        </p:txBody>
+      </p:sp>
+      <p:sp>
+        <p:nvSpPr>
+          <p:cNvPr id="11" name="TextBox 10">
+            <a:extLst>
+              <a:ext uri="{FF2B5EF4-FFF2-40B4-BE49-F238E27FC236}">
+                <a16:creationId xmlns:a16="http://schemas.microsoft.com/office/drawing/2014/main" id="{D9AF000C-E8D5-3F73-97DA-F6858A823C9D}"/>
+              </a:ext>
+            </a:extLst>
+          </p:cNvPr>
+          <p:cNvSpPr txBox="1"/>
+          <p:nvPr/>
+        </p:nvSpPr>
+        <p:spPr>
+          <a:xfrm rot="16200000">
+            <a:off x="4756889" y="1688257"/>
+            <a:ext cx="2152037" cy="369332"/>
+          </a:xfrm>
+          <a:prstGeom prst="rect">
+            <a:avLst/>
+          </a:prstGeom>
+          <a:noFill/>
+        </p:spPr>
+        <p:txBody>
+          <a:bodyPr wrap="square" rtlCol="0">
+            <a:spAutoFit/>
+          </a:bodyPr>
+          <a:lstStyle/>
+          <a:p>
+            <a:pPr algn="ctr"/>
+            <a:r>
+              <a:rPr lang="en-US" i="1" dirty="0"/>
+              <a:t>Trusted Application</a:t>
+            </a:r>
+            <a:endParaRPr lang="en-US" i="1" baseline="-25000" dirty="0"/>
+          </a:p>
+        </p:txBody>
+      </p:sp>
+      <p:sp>
+        <p:nvSpPr>
+          <p:cNvPr id="12" name="TextBox 11">
+            <a:extLst>
+              <a:ext uri="{FF2B5EF4-FFF2-40B4-BE49-F238E27FC236}">
+                <a16:creationId xmlns:a16="http://schemas.microsoft.com/office/drawing/2014/main" id="{76289E7E-C0DB-53EB-8B3E-DD82465B88F7}"/>
+              </a:ext>
+            </a:extLst>
+          </p:cNvPr>
+          <p:cNvSpPr txBox="1"/>
+          <p:nvPr/>
+        </p:nvSpPr>
+        <p:spPr>
+          <a:xfrm rot="16200000">
+            <a:off x="6270628" y="1688257"/>
+            <a:ext cx="2152037" cy="369332"/>
+          </a:xfrm>
+          <a:prstGeom prst="rect">
+            <a:avLst/>
+          </a:prstGeom>
+          <a:noFill/>
+        </p:spPr>
+        <p:txBody>
+          <a:bodyPr wrap="square" rtlCol="0">
+            <a:spAutoFit/>
+          </a:bodyPr>
+          <a:lstStyle/>
+          <a:p>
+            <a:pPr algn="ctr"/>
+            <a:r>
+              <a:rPr lang="en-US" i="1" dirty="0"/>
+              <a:t>Trusted Application</a:t>
+            </a:r>
+            <a:endParaRPr lang="en-US" i="1" baseline="-25000" dirty="0"/>
+          </a:p>
+        </p:txBody>
+      </p:sp>
+      <p:sp>
+        <p:nvSpPr>
+          <p:cNvPr id="13" name="Rectangle 12">
+            <a:extLst>
+              <a:ext uri="{FF2B5EF4-FFF2-40B4-BE49-F238E27FC236}">
+                <a16:creationId xmlns:a16="http://schemas.microsoft.com/office/drawing/2014/main" id="{BFC887FB-FD6C-9B3E-052C-58E7503E246A}"/>
+              </a:ext>
+            </a:extLst>
+          </p:cNvPr>
+          <p:cNvSpPr/>
+          <p:nvPr/>
+        </p:nvSpPr>
+        <p:spPr>
+          <a:xfrm>
+            <a:off x="5619455" y="3334251"/>
+            <a:ext cx="1262113" cy="330394"/>
+          </a:xfrm>
+          <a:prstGeom prst="rect">
+            <a:avLst/>
+          </a:prstGeom>
+          <a:solidFill>
+            <a:schemeClr val="accent6">
+              <a:lumMod val="20000"/>
+              <a:lumOff val="80000"/>
+            </a:schemeClr>
+          </a:solidFill>
+          <a:ln w="28575">
+            <a:solidFill>
+              <a:schemeClr val="tx1"/>
+            </a:solidFill>
+          </a:ln>
+        </p:spPr>
+        <p:style>
+          <a:lnRef idx="2">
+            <a:schemeClr val="accent1">
+              <a:shade val="15000"/>
+            </a:schemeClr>
+          </a:lnRef>
+          <a:fillRef idx="1">
+            <a:schemeClr val="accent1"/>
+          </a:fillRef>
+          <a:effectRef idx="0">
+            <a:schemeClr val="accent1"/>
+          </a:effectRef>
+          <a:fontRef idx="minor">
+            <a:schemeClr val="lt1"/>
+          </a:fontRef>
+        </p:style>
+        <p:txBody>
+          <a:bodyPr rtlCol="0" anchor="ctr"/>
+          <a:lstStyle/>
+          <a:p>
+            <a:pPr algn="ctr"/>
+            <a:r>
+              <a:rPr lang="en-US" dirty="0">
+                <a:solidFill>
+                  <a:schemeClr val="tx1"/>
+                </a:solidFill>
+              </a:rPr>
+              <a:t>Enclave</a:t>
+            </a:r>
+            <a:r>
+              <a:rPr lang="en-US" baseline="-25000" dirty="0">
+                <a:solidFill>
+                  <a:schemeClr val="tx1"/>
+                </a:solidFill>
+              </a:rPr>
+              <a:t>1</a:t>
+            </a:r>
+            <a:endParaRPr lang="en-US" baseline="-25000" dirty="0"/>
+          </a:p>
+        </p:txBody>
+      </p:sp>
+      <p:sp>
+        <p:nvSpPr>
+          <p:cNvPr id="14" name="Rectangle 13">
+            <a:extLst>
+              <a:ext uri="{FF2B5EF4-FFF2-40B4-BE49-F238E27FC236}">
+                <a16:creationId xmlns:a16="http://schemas.microsoft.com/office/drawing/2014/main" id="{B3EC56DE-2BF3-EA4B-3DB7-FB40763294B0}"/>
+              </a:ext>
+            </a:extLst>
+          </p:cNvPr>
+          <p:cNvSpPr/>
+          <p:nvPr/>
+        </p:nvSpPr>
+        <p:spPr>
+          <a:xfrm>
+            <a:off x="7154112" y="3324163"/>
+            <a:ext cx="1262600" cy="330394"/>
+          </a:xfrm>
+          <a:prstGeom prst="rect">
+            <a:avLst/>
+          </a:prstGeom>
+          <a:solidFill>
+            <a:schemeClr val="accent6">
+              <a:lumMod val="20000"/>
+              <a:lumOff val="80000"/>
+            </a:schemeClr>
+          </a:solidFill>
+          <a:ln w="28575">
+            <a:solidFill>
+              <a:schemeClr val="tx1"/>
+            </a:solidFill>
+          </a:ln>
+        </p:spPr>
+        <p:style>
+          <a:lnRef idx="2">
+            <a:schemeClr val="accent1">
+              <a:shade val="15000"/>
+            </a:schemeClr>
+          </a:lnRef>
+          <a:fillRef idx="1">
+            <a:schemeClr val="accent1"/>
+          </a:fillRef>
+          <a:effectRef idx="0">
+            <a:schemeClr val="accent1"/>
+          </a:effectRef>
+          <a:fontRef idx="minor">
+            <a:schemeClr val="lt1"/>
+          </a:fontRef>
+        </p:style>
+        <p:txBody>
+          <a:bodyPr rtlCol="0" anchor="ctr"/>
+          <a:lstStyle/>
+          <a:p>
+            <a:pPr algn="ctr"/>
+            <a:r>
+              <a:rPr lang="en-US" dirty="0" err="1">
+                <a:solidFill>
+                  <a:schemeClr val="tx1"/>
+                </a:solidFill>
+              </a:rPr>
+              <a:t>Enclave</a:t>
+            </a:r>
+            <a:r>
+              <a:rPr lang="en-US" baseline="-25000" dirty="0" err="1">
+                <a:solidFill>
+                  <a:schemeClr val="tx1"/>
+                </a:solidFill>
+              </a:rPr>
+              <a:t>n</a:t>
+            </a:r>
+            <a:endParaRPr lang="en-US" baseline="-25000" dirty="0"/>
+          </a:p>
+        </p:txBody>
+      </p:sp>
+      <p:sp>
+        <p:nvSpPr>
+          <p:cNvPr id="15" name="Rectangle 14">
+            <a:extLst>
+              <a:ext uri="{FF2B5EF4-FFF2-40B4-BE49-F238E27FC236}">
+                <a16:creationId xmlns:a16="http://schemas.microsoft.com/office/drawing/2014/main" id="{2AE038FF-BFBD-5E18-5EC3-55EDE9F24D09}"/>
+              </a:ext>
+            </a:extLst>
+          </p:cNvPr>
+          <p:cNvSpPr/>
+          <p:nvPr/>
+        </p:nvSpPr>
+        <p:spPr>
+          <a:xfrm>
+            <a:off x="5623964" y="3655909"/>
+            <a:ext cx="2792747" cy="330394"/>
+          </a:xfrm>
+          <a:prstGeom prst="rect">
+            <a:avLst/>
+          </a:prstGeom>
+          <a:solidFill>
+            <a:schemeClr val="accent6">
+              <a:lumMod val="20000"/>
+              <a:lumOff val="80000"/>
+            </a:schemeClr>
+          </a:solidFill>
+          <a:ln w="28575">
+            <a:solidFill>
+              <a:schemeClr val="tx1"/>
+            </a:solidFill>
+          </a:ln>
+        </p:spPr>
+        <p:style>
+          <a:lnRef idx="2">
+            <a:schemeClr val="accent1">
+              <a:shade val="15000"/>
+            </a:schemeClr>
+          </a:lnRef>
+          <a:fillRef idx="1">
+            <a:schemeClr val="accent1"/>
+          </a:fillRef>
+          <a:effectRef idx="0">
+            <a:schemeClr val="accent1"/>
+          </a:effectRef>
+          <a:fontRef idx="minor">
+            <a:schemeClr val="lt1"/>
+          </a:fontRef>
+        </p:style>
+        <p:txBody>
+          <a:bodyPr rtlCol="0" anchor="ctr"/>
+          <a:lstStyle/>
+          <a:p>
+            <a:pPr algn="ctr"/>
+            <a:r>
+              <a:rPr lang="en-US" b="1" dirty="0">
+                <a:solidFill>
+                  <a:schemeClr val="tx1"/>
+                </a:solidFill>
+                <a:latin typeface="Abadi MT Condensed Light" panose="020B0306030101010103" pitchFamily="34" charset="77"/>
+              </a:rPr>
+              <a:t>FCM, HW-ATT</a:t>
+            </a:r>
+            <a:endParaRPr lang="en-US" b="1" baseline="-25000" dirty="0">
+              <a:latin typeface="Abadi MT Condensed Light" panose="020B0306030101010103" pitchFamily="34" charset="77"/>
+            </a:endParaRPr>
+          </a:p>
+        </p:txBody>
+      </p:sp>
+      <p:cxnSp>
+        <p:nvCxnSpPr>
+          <p:cNvPr id="17" name="Straight Connector 16">
+            <a:extLst>
+              <a:ext uri="{FF2B5EF4-FFF2-40B4-BE49-F238E27FC236}">
+                <a16:creationId xmlns:a16="http://schemas.microsoft.com/office/drawing/2014/main" id="{46B12512-4AD9-B8D9-7799-57EE6A5DC654}"/>
+              </a:ext>
+            </a:extLst>
+          </p:cNvPr>
+          <p:cNvCxnSpPr>
+            <a:cxnSpLocks/>
+          </p:cNvCxnSpPr>
+          <p:nvPr/>
+        </p:nvCxnSpPr>
+        <p:spPr>
+          <a:xfrm>
+            <a:off x="3806182" y="3060742"/>
+            <a:ext cx="1817783" cy="0"/>
+          </a:xfrm>
+          <a:prstGeom prst="line">
+            <a:avLst/>
+          </a:prstGeom>
+          <a:ln w="28575" cap="flat" cmpd="sng" algn="ctr">
+            <a:solidFill>
+              <a:schemeClr val="dk1"/>
+            </a:solidFill>
+            <a:prstDash val="dash"/>
+            <a:round/>
+            <a:headEnd type="none" w="med" len="med"/>
+            <a:tailEnd type="none" w="med" len="med"/>
+          </a:ln>
+        </p:spPr>
+        <p:style>
+          <a:lnRef idx="0">
+            <a:scrgbClr r="0" g="0" b="0"/>
+          </a:lnRef>
+          <a:fillRef idx="0">
+            <a:scrgbClr r="0" g="0" b="0"/>
+          </a:fillRef>
+          <a:effectRef idx="0">
+            <a:scrgbClr r="0" g="0" b="0"/>
+          </a:effectRef>
+          <a:fontRef idx="minor">
+            <a:schemeClr val="tx1"/>
+          </a:fontRef>
+        </p:style>
+      </p:cxnSp>
+      <p:sp>
+        <p:nvSpPr>
+          <p:cNvPr id="18" name="TextBox 17">
+            <a:extLst>
+              <a:ext uri="{FF2B5EF4-FFF2-40B4-BE49-F238E27FC236}">
+                <a16:creationId xmlns:a16="http://schemas.microsoft.com/office/drawing/2014/main" id="{E8493205-9460-DD24-2AE0-DFA0D00F89DC}"/>
+              </a:ext>
+            </a:extLst>
+          </p:cNvPr>
+          <p:cNvSpPr txBox="1"/>
+          <p:nvPr/>
+        </p:nvSpPr>
+        <p:spPr>
+          <a:xfrm>
+            <a:off x="4145326" y="3141427"/>
+            <a:ext cx="1163011" cy="369332"/>
+          </a:xfrm>
+          <a:prstGeom prst="rect">
+            <a:avLst/>
+          </a:prstGeom>
+          <a:noFill/>
+        </p:spPr>
+        <p:txBody>
+          <a:bodyPr wrap="none" rtlCol="0">
+            <a:spAutoFit/>
+          </a:bodyPr>
+          <a:lstStyle/>
+          <a:p>
+            <a:r>
+              <a:rPr lang="en-US" dirty="0"/>
+              <a:t>OS Kernel</a:t>
+            </a:r>
+          </a:p>
+        </p:txBody>
+      </p:sp>
+      <p:sp>
+        <p:nvSpPr>
+          <p:cNvPr id="19" name="TextBox 18">
+            <a:extLst>
+              <a:ext uri="{FF2B5EF4-FFF2-40B4-BE49-F238E27FC236}">
+                <a16:creationId xmlns:a16="http://schemas.microsoft.com/office/drawing/2014/main" id="{1CC3F692-695E-DE5C-D8F2-D30B94E9704B}"/>
+              </a:ext>
+            </a:extLst>
+          </p:cNvPr>
+          <p:cNvSpPr txBox="1"/>
+          <p:nvPr/>
+        </p:nvSpPr>
+        <p:spPr>
+          <a:xfrm>
+            <a:off x="3976659" y="2310430"/>
+            <a:ext cx="1500347" cy="646331"/>
+          </a:xfrm>
+          <a:prstGeom prst="rect">
+            <a:avLst/>
+          </a:prstGeom>
+          <a:noFill/>
+        </p:spPr>
+        <p:txBody>
+          <a:bodyPr wrap="none" rtlCol="0">
+            <a:spAutoFit/>
+          </a:bodyPr>
+          <a:lstStyle/>
+          <a:p>
+            <a:pPr algn="ctr"/>
+            <a:r>
+              <a:rPr lang="en-US" i="1" dirty="0"/>
+              <a:t>Untrusted </a:t>
+            </a:r>
+          </a:p>
+          <a:p>
+            <a:pPr algn="ctr"/>
+            <a:r>
+              <a:rPr lang="en-US" i="1" dirty="0"/>
+              <a:t>Application/s</a:t>
+            </a:r>
+            <a:endParaRPr lang="en-US" i="1" baseline="-25000" dirty="0"/>
+          </a:p>
+        </p:txBody>
+      </p:sp>
+      <p:cxnSp>
+        <p:nvCxnSpPr>
+          <p:cNvPr id="20" name="Straight Connector 19">
+            <a:extLst>
+              <a:ext uri="{FF2B5EF4-FFF2-40B4-BE49-F238E27FC236}">
+                <a16:creationId xmlns:a16="http://schemas.microsoft.com/office/drawing/2014/main" id="{2AAAF721-C513-B299-EC58-3E07B26EAC20}"/>
+              </a:ext>
+            </a:extLst>
+          </p:cNvPr>
+          <p:cNvCxnSpPr/>
+          <p:nvPr/>
+        </p:nvCxnSpPr>
+        <p:spPr>
+          <a:xfrm>
+            <a:off x="26999" y="3060742"/>
+            <a:ext cx="3635566" cy="0"/>
+          </a:xfrm>
+          <a:prstGeom prst="line">
+            <a:avLst/>
+          </a:prstGeom>
+          <a:ln w="28575" cap="flat" cmpd="sng" algn="ctr">
+            <a:solidFill>
+              <a:schemeClr val="tx1">
+                <a:lumMod val="65000"/>
+                <a:lumOff val="35000"/>
+              </a:schemeClr>
+            </a:solidFill>
+            <a:prstDash val="dash"/>
+            <a:round/>
+            <a:headEnd type="none" w="med" len="med"/>
+            <a:tailEnd type="none" w="med" len="med"/>
+          </a:ln>
+        </p:spPr>
+        <p:style>
+          <a:lnRef idx="0">
+            <a:scrgbClr r="0" g="0" b="0"/>
+          </a:lnRef>
+          <a:fillRef idx="0">
+            <a:scrgbClr r="0" g="0" b="0"/>
+          </a:fillRef>
+          <a:effectRef idx="0">
+            <a:scrgbClr r="0" g="0" b="0"/>
+          </a:effectRef>
+          <a:fontRef idx="minor">
+            <a:schemeClr val="tx1"/>
+          </a:fontRef>
+        </p:style>
+      </p:cxnSp>
+      <p:sp>
+        <p:nvSpPr>
+          <p:cNvPr id="21" name="TextBox 20">
+            <a:extLst>
+              <a:ext uri="{FF2B5EF4-FFF2-40B4-BE49-F238E27FC236}">
+                <a16:creationId xmlns:a16="http://schemas.microsoft.com/office/drawing/2014/main" id="{0A58B204-E983-9A33-294F-42FA82EC11A3}"/>
+              </a:ext>
+            </a:extLst>
+          </p:cNvPr>
+          <p:cNvSpPr txBox="1"/>
+          <p:nvPr/>
+        </p:nvSpPr>
+        <p:spPr>
+          <a:xfrm>
+            <a:off x="457326" y="3141427"/>
+            <a:ext cx="1163011" cy="369332"/>
+          </a:xfrm>
+          <a:prstGeom prst="rect">
+            <a:avLst/>
+          </a:prstGeom>
+          <a:noFill/>
+        </p:spPr>
+        <p:txBody>
+          <a:bodyPr wrap="none" rtlCol="0">
+            <a:spAutoFit/>
+          </a:bodyPr>
+          <a:lstStyle/>
+          <a:p>
+            <a:r>
+              <a:rPr lang="en-US" dirty="0">
+                <a:solidFill>
+                  <a:schemeClr val="tx1">
+                    <a:lumMod val="65000"/>
+                    <a:lumOff val="35000"/>
+                  </a:schemeClr>
+                </a:solidFill>
+              </a:rPr>
+              <a:t>OS Kernel</a:t>
+            </a:r>
+          </a:p>
+        </p:txBody>
+      </p:sp>
+      <p:sp>
+        <p:nvSpPr>
+          <p:cNvPr id="22" name="TextBox 21">
+            <a:extLst>
+              <a:ext uri="{FF2B5EF4-FFF2-40B4-BE49-F238E27FC236}">
+                <a16:creationId xmlns:a16="http://schemas.microsoft.com/office/drawing/2014/main" id="{E051968E-ECCA-0684-68D6-1C038006239A}"/>
+              </a:ext>
+            </a:extLst>
+          </p:cNvPr>
+          <p:cNvSpPr txBox="1"/>
+          <p:nvPr/>
+        </p:nvSpPr>
+        <p:spPr>
+          <a:xfrm>
+            <a:off x="197946" y="2310430"/>
+            <a:ext cx="1500347" cy="646331"/>
+          </a:xfrm>
+          <a:prstGeom prst="rect">
+            <a:avLst/>
+          </a:prstGeom>
+          <a:noFill/>
+        </p:spPr>
+        <p:txBody>
+          <a:bodyPr wrap="none" rtlCol="0">
+            <a:spAutoFit/>
+          </a:bodyPr>
+          <a:lstStyle/>
+          <a:p>
+            <a:pPr algn="ctr"/>
+            <a:r>
+              <a:rPr lang="en-US" i="1" dirty="0">
+                <a:solidFill>
+                  <a:schemeClr val="tx1">
+                    <a:lumMod val="65000"/>
+                    <a:lumOff val="35000"/>
+                  </a:schemeClr>
+                </a:solidFill>
+              </a:rPr>
+              <a:t>Untrusted </a:t>
+            </a:r>
+          </a:p>
+          <a:p>
+            <a:pPr algn="ctr"/>
+            <a:r>
+              <a:rPr lang="en-US" i="1" dirty="0">
+                <a:solidFill>
+                  <a:schemeClr val="tx1">
+                    <a:lumMod val="65000"/>
+                    <a:lumOff val="35000"/>
+                  </a:schemeClr>
+                </a:solidFill>
+              </a:rPr>
+              <a:t>Application/s</a:t>
+            </a:r>
+            <a:endParaRPr lang="en-US" i="1" baseline="-25000" dirty="0">
+              <a:solidFill>
+                <a:schemeClr val="tx1">
+                  <a:lumMod val="65000"/>
+                  <a:lumOff val="35000"/>
+                </a:schemeClr>
+              </a:solidFill>
+            </a:endParaRPr>
+          </a:p>
+        </p:txBody>
+      </p:sp>
+      <p:pic>
+        <p:nvPicPr>
+          <p:cNvPr id="23" name="Picture 22">
+            <a:extLst>
+              <a:ext uri="{FF2B5EF4-FFF2-40B4-BE49-F238E27FC236}">
+                <a16:creationId xmlns:a16="http://schemas.microsoft.com/office/drawing/2014/main" id="{76325371-BF54-0289-0A16-1CD789E1F689}"/>
+              </a:ext>
+            </a:extLst>
+          </p:cNvPr>
+          <p:cNvPicPr>
+            <a:picLocks noChangeAspect="1"/>
+          </p:cNvPicPr>
+          <p:nvPr/>
+        </p:nvPicPr>
+        <p:blipFill>
+          <a:blip r:embed="rId3"/>
+          <a:srcRect/>
+          <a:stretch>
+            <a:fillRect/>
+          </a:stretch>
+        </p:blipFill>
+        <p:spPr>
+          <a:xfrm>
+            <a:off x="125612" y="3999114"/>
+            <a:ext cx="476250" cy="304800"/>
+          </a:xfrm>
+          <a:prstGeom prst="rect">
+            <a:avLst/>
+          </a:prstGeom>
+        </p:spPr>
+      </p:pic>
+      <p:pic>
+        <p:nvPicPr>
+          <p:cNvPr id="24" name="Picture 23">
+            <a:extLst>
+              <a:ext uri="{FF2B5EF4-FFF2-40B4-BE49-F238E27FC236}">
+                <a16:creationId xmlns:a16="http://schemas.microsoft.com/office/drawing/2014/main" id="{95F88154-17FB-5A5D-58A2-15E1F9C111D6}"/>
+              </a:ext>
+            </a:extLst>
+          </p:cNvPr>
+          <p:cNvPicPr>
+            <a:picLocks noChangeAspect="1"/>
+          </p:cNvPicPr>
+          <p:nvPr/>
+        </p:nvPicPr>
+        <p:blipFill>
+          <a:blip r:embed="rId4"/>
+          <a:srcRect/>
+          <a:stretch>
+            <a:fillRect/>
+          </a:stretch>
+        </p:blipFill>
+        <p:spPr>
+          <a:xfrm>
+            <a:off x="1752193" y="3999114"/>
+            <a:ext cx="270808" cy="301885"/>
+          </a:xfrm>
+          <a:prstGeom prst="rect">
+            <a:avLst/>
+          </a:prstGeom>
+        </p:spPr>
+      </p:pic>
+      <p:pic>
+        <p:nvPicPr>
+          <p:cNvPr id="25" name="Picture 24">
+            <a:extLst>
+              <a:ext uri="{FF2B5EF4-FFF2-40B4-BE49-F238E27FC236}">
+                <a16:creationId xmlns:a16="http://schemas.microsoft.com/office/drawing/2014/main" id="{3F3ADF9A-DE1E-CCBB-CC92-3083468D3BE1}"/>
+              </a:ext>
+            </a:extLst>
+          </p:cNvPr>
+          <p:cNvPicPr>
+            <a:picLocks noChangeAspect="1"/>
+          </p:cNvPicPr>
+          <p:nvPr/>
+        </p:nvPicPr>
+        <p:blipFill>
+          <a:blip r:embed="rId5"/>
+          <a:srcRect/>
+          <a:stretch>
+            <a:fillRect/>
+          </a:stretch>
+        </p:blipFill>
+        <p:spPr>
+          <a:xfrm>
+            <a:off x="3260553" y="3999114"/>
+            <a:ext cx="337106" cy="301885"/>
+          </a:xfrm>
+          <a:prstGeom prst="rect">
+            <a:avLst/>
+          </a:prstGeom>
+        </p:spPr>
+      </p:pic>
+      <p:pic>
+        <p:nvPicPr>
+          <p:cNvPr id="26" name="Picture 25">
+            <a:extLst>
+              <a:ext uri="{FF2B5EF4-FFF2-40B4-BE49-F238E27FC236}">
+                <a16:creationId xmlns:a16="http://schemas.microsoft.com/office/drawing/2014/main" id="{ABE94CD5-DD01-87F9-AD69-037610AC554A}"/>
+              </a:ext>
+            </a:extLst>
+          </p:cNvPr>
+          <p:cNvPicPr>
+            <a:picLocks noChangeAspect="1"/>
+          </p:cNvPicPr>
+          <p:nvPr/>
+        </p:nvPicPr>
+        <p:blipFill>
+          <a:blip r:embed="rId6"/>
+          <a:srcRect/>
+          <a:stretch>
+            <a:fillRect/>
+          </a:stretch>
+        </p:blipFill>
+        <p:spPr>
+          <a:xfrm>
+            <a:off x="1029543" y="3999114"/>
+            <a:ext cx="294968" cy="310493"/>
+          </a:xfrm>
+          <a:prstGeom prst="rect">
+            <a:avLst/>
+          </a:prstGeom>
+        </p:spPr>
+      </p:pic>
+      <p:pic>
+        <p:nvPicPr>
+          <p:cNvPr id="27" name="Picture 26">
+            <a:extLst>
+              <a:ext uri="{FF2B5EF4-FFF2-40B4-BE49-F238E27FC236}">
+                <a16:creationId xmlns:a16="http://schemas.microsoft.com/office/drawing/2014/main" id="{F2398E1C-054A-7BA7-F1B3-E97FDF34AD26}"/>
+              </a:ext>
+            </a:extLst>
+          </p:cNvPr>
+          <p:cNvPicPr>
+            <a:picLocks noChangeAspect="1"/>
+          </p:cNvPicPr>
+          <p:nvPr/>
+        </p:nvPicPr>
+        <p:blipFill>
+          <a:blip r:embed="rId7"/>
+          <a:srcRect/>
+          <a:stretch>
+            <a:fillRect/>
+          </a:stretch>
+        </p:blipFill>
+        <p:spPr>
+          <a:xfrm>
+            <a:off x="2472764" y="3999114"/>
+            <a:ext cx="338026" cy="302710"/>
+          </a:xfrm>
+          <a:prstGeom prst="rect">
+            <a:avLst/>
+          </a:prstGeom>
+        </p:spPr>
+      </p:pic>
+      <p:pic>
+        <p:nvPicPr>
+          <p:cNvPr id="34" name="Picture 33">
+            <a:extLst>
+              <a:ext uri="{FF2B5EF4-FFF2-40B4-BE49-F238E27FC236}">
+                <a16:creationId xmlns:a16="http://schemas.microsoft.com/office/drawing/2014/main" id="{66BD89FA-A7EB-1360-E375-B8A0524293AD}"/>
+              </a:ext>
+            </a:extLst>
+          </p:cNvPr>
+          <p:cNvPicPr>
+            <a:picLocks noChangeAspect="1"/>
+          </p:cNvPicPr>
+          <p:nvPr/>
+        </p:nvPicPr>
+        <p:blipFill>
+          <a:blip r:embed="rId5"/>
+          <a:srcRect/>
+          <a:stretch>
+            <a:fillRect/>
+          </a:stretch>
+        </p:blipFill>
+        <p:spPr>
+          <a:xfrm>
+            <a:off x="6507637" y="3994119"/>
+            <a:ext cx="337106" cy="301885"/>
+          </a:xfrm>
+          <a:prstGeom prst="rect">
+            <a:avLst/>
+          </a:prstGeom>
+        </p:spPr>
+      </p:pic>
+      <p:pic>
+        <p:nvPicPr>
+          <p:cNvPr id="35" name="Picture 34">
+            <a:extLst>
+              <a:ext uri="{FF2B5EF4-FFF2-40B4-BE49-F238E27FC236}">
+                <a16:creationId xmlns:a16="http://schemas.microsoft.com/office/drawing/2014/main" id="{2CA5056A-9571-2B7B-A7C9-08CA4D5F4FDC}"/>
+              </a:ext>
+            </a:extLst>
+          </p:cNvPr>
+          <p:cNvPicPr>
+            <a:picLocks noChangeAspect="1"/>
+          </p:cNvPicPr>
+          <p:nvPr/>
+        </p:nvPicPr>
+        <p:blipFill>
+          <a:blip r:embed="rId4"/>
+          <a:srcRect/>
+          <a:stretch>
+            <a:fillRect/>
+          </a:stretch>
+        </p:blipFill>
+        <p:spPr>
+          <a:xfrm>
+            <a:off x="5780759" y="3998248"/>
+            <a:ext cx="270808" cy="301885"/>
+          </a:xfrm>
+          <a:prstGeom prst="rect">
+            <a:avLst/>
+          </a:prstGeom>
+        </p:spPr>
+      </p:pic>
+      <p:pic>
+        <p:nvPicPr>
+          <p:cNvPr id="36" name="Picture 35">
+            <a:extLst>
+              <a:ext uri="{FF2B5EF4-FFF2-40B4-BE49-F238E27FC236}">
+                <a16:creationId xmlns:a16="http://schemas.microsoft.com/office/drawing/2014/main" id="{677408C3-C946-7329-50BD-CE099CBB42F8}"/>
+              </a:ext>
+            </a:extLst>
+          </p:cNvPr>
+          <p:cNvPicPr>
+            <a:picLocks noChangeAspect="1"/>
+          </p:cNvPicPr>
+          <p:nvPr/>
+        </p:nvPicPr>
+        <p:blipFill>
+          <a:blip r:embed="rId6"/>
+          <a:srcRect/>
+          <a:stretch>
+            <a:fillRect/>
+          </a:stretch>
+        </p:blipFill>
+        <p:spPr>
+          <a:xfrm>
+            <a:off x="7248757" y="4001896"/>
+            <a:ext cx="294968" cy="310493"/>
+          </a:xfrm>
+          <a:prstGeom prst="rect">
+            <a:avLst/>
+          </a:prstGeom>
+        </p:spPr>
+      </p:pic>
+      <p:pic>
+        <p:nvPicPr>
+          <p:cNvPr id="37" name="Picture 36">
+            <a:extLst>
+              <a:ext uri="{FF2B5EF4-FFF2-40B4-BE49-F238E27FC236}">
+                <a16:creationId xmlns:a16="http://schemas.microsoft.com/office/drawing/2014/main" id="{3DC31157-0C5E-3A06-68C7-11CA50B28D6F}"/>
+              </a:ext>
+            </a:extLst>
+          </p:cNvPr>
+          <p:cNvPicPr>
+            <a:picLocks noChangeAspect="1"/>
+          </p:cNvPicPr>
+          <p:nvPr/>
+        </p:nvPicPr>
+        <p:blipFill>
+          <a:blip r:embed="rId7"/>
+          <a:srcRect/>
+          <a:stretch>
+            <a:fillRect/>
+          </a:stretch>
+        </p:blipFill>
+        <p:spPr>
+          <a:xfrm>
+            <a:off x="7973632" y="4009679"/>
+            <a:ext cx="338026" cy="302710"/>
+          </a:xfrm>
+          <a:prstGeom prst="rect">
+            <a:avLst/>
+          </a:prstGeom>
+        </p:spPr>
+      </p:pic>
+      <p:pic>
+        <p:nvPicPr>
+          <p:cNvPr id="38" name="Picture 37">
+            <a:extLst>
+              <a:ext uri="{FF2B5EF4-FFF2-40B4-BE49-F238E27FC236}">
+                <a16:creationId xmlns:a16="http://schemas.microsoft.com/office/drawing/2014/main" id="{DF9836CE-F8FF-F40F-C1E4-ACC60BB159E4}"/>
+              </a:ext>
+            </a:extLst>
+          </p:cNvPr>
+          <p:cNvPicPr>
+            <a:picLocks noChangeAspect="1"/>
+          </p:cNvPicPr>
+          <p:nvPr/>
+        </p:nvPicPr>
+        <p:blipFill>
+          <a:blip r:embed="rId3"/>
+          <a:srcRect/>
+          <a:stretch>
+            <a:fillRect/>
+          </a:stretch>
+        </p:blipFill>
+        <p:spPr>
+          <a:xfrm>
+            <a:off x="4521102" y="3992349"/>
+            <a:ext cx="476250" cy="304800"/>
+          </a:xfrm>
+          <a:prstGeom prst="rect">
+            <a:avLst/>
+          </a:prstGeom>
+        </p:spPr>
+      </p:pic>
+      <p:sp>
+        <p:nvSpPr>
+          <p:cNvPr id="39" name="Rectangle 38">
+            <a:extLst>
+              <a:ext uri="{FF2B5EF4-FFF2-40B4-BE49-F238E27FC236}">
+                <a16:creationId xmlns:a16="http://schemas.microsoft.com/office/drawing/2014/main" id="{CF6A9AD1-95D0-E142-6998-C1BFFDE435AF}"/>
+              </a:ext>
+            </a:extLst>
+          </p:cNvPr>
+          <p:cNvSpPr/>
+          <p:nvPr/>
+        </p:nvSpPr>
+        <p:spPr>
+          <a:xfrm>
+            <a:off x="3806182" y="3664645"/>
+            <a:ext cx="1817783" cy="326536"/>
+          </a:xfrm>
+          <a:prstGeom prst="rect">
+            <a:avLst/>
+          </a:prstGeom>
+          <a:solidFill>
+            <a:schemeClr val="accent2">
+              <a:lumMod val="20000"/>
+              <a:lumOff val="80000"/>
+            </a:schemeClr>
+          </a:solidFill>
+          <a:ln w="28575">
+            <a:solidFill>
+              <a:schemeClr val="tx1"/>
+            </a:solidFill>
+          </a:ln>
+        </p:spPr>
+        <p:style>
+          <a:lnRef idx="2">
+            <a:schemeClr val="accent1">
+              <a:shade val="15000"/>
+            </a:schemeClr>
+          </a:lnRef>
+          <a:fillRef idx="1">
+            <a:schemeClr val="accent1"/>
+          </a:fillRef>
+          <a:effectRef idx="0">
+            <a:schemeClr val="accent1"/>
+          </a:effectRef>
+          <a:fontRef idx="minor">
+            <a:schemeClr val="lt1"/>
+          </a:fontRef>
+        </p:style>
+        <p:txBody>
+          <a:bodyPr lIns="0" rIns="0" rtlCol="0" anchor="ctr"/>
+          <a:lstStyle/>
+          <a:p>
+            <a:pPr algn="ctr"/>
+            <a:r>
+              <a:rPr lang="en-US" sz="1500" dirty="0">
+                <a:solidFill>
+                  <a:schemeClr val="tx1"/>
+                </a:solidFill>
+              </a:rPr>
+              <a:t>CPU, Memory, Cache</a:t>
+            </a:r>
           </a:p>
         </p:txBody>
       </p:sp>

--- a/figs/byotee-overview.pptx
+++ b/figs/byotee-overview.pptx
@@ -197,7 +197,7 @@
           <a:p>
             <a:fld id="{B4313A1E-513A-C146-8DB7-A4D1DCEAAF7D}" type="datetimeFigureOut">
               <a:rPr lang="en-US" smtClean="0"/>
-              <a:t>8/26/26</a:t>
+              <a:t>9/11/26</a:t>
             </a:fld>
             <a:endParaRPr lang="en-US"/>
           </a:p>
@@ -679,7 +679,7 @@
           <a:p>
             <a:fld id="{728D558A-DF59-A249-A8DD-6F235DCEC2AE}" type="datetimeFigureOut">
               <a:rPr lang="en-US" smtClean="0"/>
-              <a:t>8/26/26</a:t>
+              <a:t>9/11/26</a:t>
             </a:fld>
             <a:endParaRPr lang="en-US"/>
           </a:p>
@@ -849,7 +849,7 @@
           <a:p>
             <a:fld id="{728D558A-DF59-A249-A8DD-6F235DCEC2AE}" type="datetimeFigureOut">
               <a:rPr lang="en-US" smtClean="0"/>
-              <a:t>8/26/26</a:t>
+              <a:t>9/11/26</a:t>
             </a:fld>
             <a:endParaRPr lang="en-US"/>
           </a:p>
@@ -1029,7 +1029,7 @@
           <a:p>
             <a:fld id="{728D558A-DF59-A249-A8DD-6F235DCEC2AE}" type="datetimeFigureOut">
               <a:rPr lang="en-US" smtClean="0"/>
-              <a:t>8/26/26</a:t>
+              <a:t>9/11/26</a:t>
             </a:fld>
             <a:endParaRPr lang="en-US"/>
           </a:p>
@@ -1199,7 +1199,7 @@
           <a:p>
             <a:fld id="{728D558A-DF59-A249-A8DD-6F235DCEC2AE}" type="datetimeFigureOut">
               <a:rPr lang="en-US" smtClean="0"/>
-              <a:t>8/26/26</a:t>
+              <a:t>9/11/26</a:t>
             </a:fld>
             <a:endParaRPr lang="en-US"/>
           </a:p>
@@ -1445,7 +1445,7 @@
           <a:p>
             <a:fld id="{728D558A-DF59-A249-A8DD-6F235DCEC2AE}" type="datetimeFigureOut">
               <a:rPr lang="en-US" smtClean="0"/>
-              <a:t>8/26/26</a:t>
+              <a:t>9/11/26</a:t>
             </a:fld>
             <a:endParaRPr lang="en-US"/>
           </a:p>
@@ -1677,7 +1677,7 @@
           <a:p>
             <a:fld id="{728D558A-DF59-A249-A8DD-6F235DCEC2AE}" type="datetimeFigureOut">
               <a:rPr lang="en-US" smtClean="0"/>
-              <a:t>8/26/26</a:t>
+              <a:t>9/11/26</a:t>
             </a:fld>
             <a:endParaRPr lang="en-US"/>
           </a:p>
@@ -2044,7 +2044,7 @@
           <a:p>
             <a:fld id="{728D558A-DF59-A249-A8DD-6F235DCEC2AE}" type="datetimeFigureOut">
               <a:rPr lang="en-US" smtClean="0"/>
-              <a:t>8/26/26</a:t>
+              <a:t>9/11/26</a:t>
             </a:fld>
             <a:endParaRPr lang="en-US"/>
           </a:p>
@@ -2162,7 +2162,7 @@
           <a:p>
             <a:fld id="{728D558A-DF59-A249-A8DD-6F235DCEC2AE}" type="datetimeFigureOut">
               <a:rPr lang="en-US" smtClean="0"/>
-              <a:t>8/26/26</a:t>
+              <a:t>9/11/26</a:t>
             </a:fld>
             <a:endParaRPr lang="en-US"/>
           </a:p>
@@ -2257,7 +2257,7 @@
           <a:p>
             <a:fld id="{728D558A-DF59-A249-A8DD-6F235DCEC2AE}" type="datetimeFigureOut">
               <a:rPr lang="en-US" smtClean="0"/>
-              <a:t>8/26/26</a:t>
+              <a:t>9/11/26</a:t>
             </a:fld>
             <a:endParaRPr lang="en-US"/>
           </a:p>
@@ -2534,7 +2534,7 @@
           <a:p>
             <a:fld id="{728D558A-DF59-A249-A8DD-6F235DCEC2AE}" type="datetimeFigureOut">
               <a:rPr lang="en-US" smtClean="0"/>
-              <a:t>8/26/26</a:t>
+              <a:t>9/11/26</a:t>
             </a:fld>
             <a:endParaRPr lang="en-US"/>
           </a:p>
@@ -2791,7 +2791,7 @@
           <a:p>
             <a:fld id="{728D558A-DF59-A249-A8DD-6F235DCEC2AE}" type="datetimeFigureOut">
               <a:rPr lang="en-US" smtClean="0"/>
-              <a:t>8/26/26</a:t>
+              <a:t>9/11/26</a:t>
             </a:fld>
             <a:endParaRPr lang="en-US"/>
           </a:p>
@@ -3004,7 +3004,7 @@
           <a:p>
             <a:fld id="{728D558A-DF59-A249-A8DD-6F235DCEC2AE}" type="datetimeFigureOut">
               <a:rPr lang="en-US" smtClean="0"/>
-              <a:t>8/26/26</a:t>
+              <a:t>9/11/26</a:t>
             </a:fld>
             <a:endParaRPr lang="en-US"/>
           </a:p>
@@ -5986,6 +5986,41 @@
                 </a:solidFill>
               </a:rPr>
               <a:t>CPU, Memory, Cache</a:t>
+            </a:r>
+          </a:p>
+        </p:txBody>
+      </p:sp>
+      <p:sp>
+        <p:nvSpPr>
+          <p:cNvPr id="30" name="TextBox 29">
+            <a:extLst>
+              <a:ext uri="{FF2B5EF4-FFF2-40B4-BE49-F238E27FC236}">
+                <a16:creationId xmlns:a16="http://schemas.microsoft.com/office/drawing/2014/main" id="{5C57C445-D3DF-B027-AAA9-6CF9C43CB3AF}"/>
+              </a:ext>
+            </a:extLst>
+          </p:cNvPr>
+          <p:cNvSpPr txBox="1"/>
+          <p:nvPr/>
+        </p:nvSpPr>
+        <p:spPr>
+          <a:xfrm rot="16200000">
+            <a:off x="6741936" y="1714152"/>
+            <a:ext cx="381836" cy="477054"/>
+          </a:xfrm>
+          <a:prstGeom prst="rect">
+            <a:avLst/>
+          </a:prstGeom>
+          <a:noFill/>
+        </p:spPr>
+        <p:txBody>
+          <a:bodyPr wrap="square" rtlCol="0">
+            <a:spAutoFit/>
+          </a:bodyPr>
+          <a:lstStyle/>
+          <a:p>
+            <a:r>
+              <a:rPr lang="en-US" sz="2500" dirty="0"/>
+              <a:t>…</a:t>
             </a:r>
           </a:p>
         </p:txBody>
